--- a/2026-Q2/5-AbrahamAndFaith-Ch4/2026-05-10-Romans-Ch4.pptx
+++ b/2026-Q2/5-AbrahamAndFaith-Ch4/2026-05-10-Romans-Ch4.pptx
@@ -22,7 +22,7 @@
     <p:sldId id="551" r:id="rId13"/>
   </p:sldIdLst>
   <p:sldSz cx="9144000" cy="6858000" type="screen4x3"/>
-  <p:notesSz cx="7315200" cy="12344400"/>
+  <p:notesSz cx="7099300" cy="12128500"/>
   <p:defaultTextStyle>
     <a:defPPr>
       <a:defRPr lang="en-US"/>
@@ -201,22 +201,22 @@
         </p:nvSpPr>
         <p:spPr>
           <a:xfrm>
-            <a:off x="4" y="1"/>
-            <a:ext cx="3169921" cy="617220"/>
+            <a:off x="5" y="2"/>
+            <a:ext cx="3076364" cy="606425"/>
           </a:xfrm>
           <a:prstGeom prst="rect">
             <a:avLst/>
           </a:prstGeom>
         </p:spPr>
         <p:txBody>
-          <a:bodyPr vert="horz" wrap="square" lIns="81036" tIns="40518" rIns="81036" bIns="40518" numCol="1" anchor="t" anchorCtr="0" compatLnSpc="1">
+          <a:bodyPr vert="horz" wrap="square" lIns="67949" tIns="33974" rIns="67949" bIns="33974" numCol="1" anchor="t" anchorCtr="0" compatLnSpc="1">
             <a:prstTxWarp prst="textNoShape">
               <a:avLst/>
             </a:prstTxWarp>
           </a:bodyPr>
           <a:lstStyle>
             <a:lvl1pPr>
-              <a:defRPr sz="1000">
+              <a:defRPr sz="800">
                 <a:latin typeface="Arial" pitchFamily="34" charset="0"/>
                 <a:ea typeface="ＭＳ Ｐゴシック" pitchFamily="-106" charset="-128"/>
               </a:defRPr>
@@ -242,22 +242,22 @@
         </p:nvSpPr>
         <p:spPr>
           <a:xfrm>
-            <a:off x="4143591" y="1"/>
-            <a:ext cx="3169921" cy="617220"/>
+            <a:off x="4021298" y="2"/>
+            <a:ext cx="3076364" cy="606425"/>
           </a:xfrm>
           <a:prstGeom prst="rect">
             <a:avLst/>
           </a:prstGeom>
         </p:spPr>
         <p:txBody>
-          <a:bodyPr vert="horz" wrap="square" lIns="81036" tIns="40518" rIns="81036" bIns="40518" numCol="1" anchor="t" anchorCtr="0" compatLnSpc="1">
+          <a:bodyPr vert="horz" wrap="square" lIns="67949" tIns="33974" rIns="67949" bIns="33974" numCol="1" anchor="t" anchorCtr="0" compatLnSpc="1">
             <a:prstTxWarp prst="textNoShape">
               <a:avLst/>
             </a:prstTxWarp>
           </a:bodyPr>
           <a:lstStyle>
             <a:lvl1pPr algn="r">
-              <a:defRPr sz="1000">
+              <a:defRPr sz="800">
                 <a:latin typeface="Arial" pitchFamily="34" charset="0"/>
                 <a:ea typeface="ＭＳ Ｐゴシック" pitchFamily="-106" charset="-128"/>
               </a:defRPr>
@@ -272,7 +272,7 @@
               <a:pPr>
                 <a:defRPr/>
               </a:pPr>
-              <a:t>5/4/2026</a:t>
+              <a:t>5/10/2026</a:t>
             </a:fld>
             <a:endParaRPr lang="en-US"/>
           </a:p>
@@ -290,8 +290,8 @@
         </p:nvSpPr>
         <p:spPr>
           <a:xfrm>
-            <a:off x="571500" y="927100"/>
-            <a:ext cx="6172200" cy="4629150"/>
+            <a:off x="517525" y="911225"/>
+            <a:ext cx="6064250" cy="4548188"/>
           </a:xfrm>
           <a:prstGeom prst="rect">
             <a:avLst/>
@@ -304,7 +304,7 @@
           </a:ln>
         </p:spPr>
         <p:txBody>
-          <a:bodyPr vert="horz" wrap="square" lIns="81036" tIns="40518" rIns="81036" bIns="40518" numCol="1" anchor="ctr" anchorCtr="0" compatLnSpc="1">
+          <a:bodyPr vert="horz" wrap="square" lIns="67949" tIns="33974" rIns="67949" bIns="33974" numCol="1" anchor="ctr" anchorCtr="0" compatLnSpc="1">
             <a:prstTxWarp prst="textNoShape">
               <a:avLst/>
             </a:prstTxWarp>
@@ -328,15 +328,15 @@
         </p:nvSpPr>
         <p:spPr>
           <a:xfrm>
-            <a:off x="731521" y="5863593"/>
-            <a:ext cx="5852160" cy="5554980"/>
+            <a:off x="709931" y="5761041"/>
+            <a:ext cx="5679440" cy="5457825"/>
           </a:xfrm>
           <a:prstGeom prst="rect">
             <a:avLst/>
           </a:prstGeom>
         </p:spPr>
         <p:txBody>
-          <a:bodyPr vert="horz" wrap="square" lIns="81036" tIns="40518" rIns="81036" bIns="40518" numCol="1" anchor="t" anchorCtr="0" compatLnSpc="1">
+          <a:bodyPr vert="horz" wrap="square" lIns="67949" tIns="33974" rIns="67949" bIns="33974" numCol="1" anchor="t" anchorCtr="0" compatLnSpc="1">
             <a:prstTxWarp prst="textNoShape">
               <a:avLst/>
             </a:prstTxWarp>
@@ -392,22 +392,22 @@
         </p:nvSpPr>
         <p:spPr>
           <a:xfrm>
-            <a:off x="4" y="11725039"/>
-            <a:ext cx="3169921" cy="617220"/>
+            <a:off x="5" y="11519972"/>
+            <a:ext cx="3076364" cy="606425"/>
           </a:xfrm>
           <a:prstGeom prst="rect">
             <a:avLst/>
           </a:prstGeom>
         </p:spPr>
         <p:txBody>
-          <a:bodyPr vert="horz" wrap="square" lIns="81036" tIns="40518" rIns="81036" bIns="40518" numCol="1" anchor="b" anchorCtr="0" compatLnSpc="1">
+          <a:bodyPr vert="horz" wrap="square" lIns="67949" tIns="33974" rIns="67949" bIns="33974" numCol="1" anchor="b" anchorCtr="0" compatLnSpc="1">
             <a:prstTxWarp prst="textNoShape">
               <a:avLst/>
             </a:prstTxWarp>
           </a:bodyPr>
           <a:lstStyle>
             <a:lvl1pPr>
-              <a:defRPr sz="1000">
+              <a:defRPr sz="800">
                 <a:latin typeface="Arial" pitchFamily="34" charset="0"/>
                 <a:ea typeface="ＭＳ Ｐゴシック" pitchFamily="-106" charset="-128"/>
               </a:defRPr>
@@ -433,22 +433,22 @@
         </p:nvSpPr>
         <p:spPr>
           <a:xfrm>
-            <a:off x="4143591" y="11725039"/>
-            <a:ext cx="3169921" cy="617220"/>
+            <a:off x="4021298" y="11519972"/>
+            <a:ext cx="3076364" cy="606425"/>
           </a:xfrm>
           <a:prstGeom prst="rect">
             <a:avLst/>
           </a:prstGeom>
         </p:spPr>
         <p:txBody>
-          <a:bodyPr vert="horz" wrap="square" lIns="81036" tIns="40518" rIns="81036" bIns="40518" numCol="1" anchor="b" anchorCtr="0" compatLnSpc="1">
+          <a:bodyPr vert="horz" wrap="square" lIns="67949" tIns="33974" rIns="67949" bIns="33974" numCol="1" anchor="b" anchorCtr="0" compatLnSpc="1">
             <a:prstTxWarp prst="textNoShape">
               <a:avLst/>
             </a:prstTxWarp>
           </a:bodyPr>
           <a:lstStyle>
             <a:lvl1pPr algn="r">
-              <a:defRPr sz="1000">
+              <a:defRPr sz="800">
                 <a:latin typeface="Arial" pitchFamily="34" charset="0"/>
                 <a:ea typeface="ＭＳ Ｐゴシック" pitchFamily="-106" charset="-128"/>
               </a:defRPr>
@@ -649,7 +649,7 @@
             <a:endParaRPr lang="en-US" baseline="0" dirty="0"/>
           </a:p>
           <a:p>
-            <a:pPr marL="147631" indent="-147631">
+            <a:pPr marL="123789" indent="-123789">
               <a:buFont typeface="Arial" pitchFamily="34" charset="0"/>
               <a:buChar char="•"/>
             </a:pPr>
@@ -764,312 +764,124 @@
           <a:lstStyle/>
           <a:p>
             <a:r>
-              <a:rPr lang="en-US" sz="1400" b="1" kern="1200" dirty="0">
-                <a:solidFill>
-                  <a:schemeClr val="tx1"/>
-                </a:solidFill>
-                <a:effectLst/>
-                <a:latin typeface="+mn-lt"/>
-                <a:ea typeface="ＭＳ Ｐゴシック" pitchFamily="-106" charset="-128"/>
-                <a:cs typeface="ＭＳ Ｐゴシック" pitchFamily="-106" charset="-128"/>
-              </a:rPr>
+              <a:rPr lang="en-US" b="1" dirty="0"/>
               <a:t>The Promise as Eschatological Hope</a:t>
             </a:r>
           </a:p>
           <a:p>
-            <a:endParaRPr lang="en-US" sz="1400" kern="1200" dirty="0">
-              <a:solidFill>
-                <a:schemeClr val="tx1"/>
-              </a:solidFill>
-              <a:effectLst/>
-              <a:latin typeface="+mn-lt"/>
-              <a:ea typeface="ＭＳ Ｐゴシック" pitchFamily="-106" charset="-128"/>
-              <a:cs typeface="ＭＳ Ｐゴシック" pitchFamily="-106" charset="-128"/>
-            </a:endParaRPr>
-          </a:p>
-          <a:p>
-            <a:r>
-              <a:rPr lang="en-US" sz="1400" kern="1200" dirty="0">
-                <a:solidFill>
-                  <a:schemeClr val="tx1"/>
-                </a:solidFill>
-                <a:effectLst/>
-                <a:latin typeface="+mn-lt"/>
-                <a:ea typeface="ＭＳ Ｐゴシック" pitchFamily="-106" charset="-128"/>
-                <a:cs typeface="ＭＳ Ｐゴシック" pitchFamily="-106" charset="-128"/>
-              </a:rPr>
+            <a:endParaRPr lang="en-US" dirty="0"/>
+          </a:p>
+          <a:p>
+            <a:r>
+              <a:rPr lang="en-US" dirty="0"/>
               <a:t>These passages </a:t>
             </a:r>
             <a:r>
-              <a:rPr lang="en-US" sz="1400" b="1" kern="1200" dirty="0">
-                <a:solidFill>
-                  <a:schemeClr val="tx1"/>
-                </a:solidFill>
-                <a:effectLst/>
-                <a:latin typeface="+mn-lt"/>
-                <a:ea typeface="ＭＳ Ｐゴシック" pitchFamily="-106" charset="-128"/>
-                <a:cs typeface="ＭＳ Ｐゴシック" pitchFamily="-106" charset="-128"/>
-              </a:rPr>
+              <a:rPr lang="en-US" b="1" dirty="0"/>
               <a:t>tie Abraham’s promise to final inheritance and eternal life.</a:t>
             </a:r>
           </a:p>
           <a:p>
-            <a:endParaRPr lang="en-US" sz="1400" kern="1200" dirty="0">
-              <a:solidFill>
-                <a:schemeClr val="tx1"/>
-              </a:solidFill>
-              <a:effectLst/>
-              <a:latin typeface="+mn-lt"/>
-              <a:ea typeface="ＭＳ Ｐゴシック" pitchFamily="-106" charset="-128"/>
-              <a:cs typeface="ＭＳ Ｐゴシック" pitchFamily="-106" charset="-128"/>
-            </a:endParaRPr>
+            <a:endParaRPr lang="en-US" dirty="0"/>
           </a:p>
           <a:p>
             <a:pPr rtl="0" fontAlgn="ctr"/>
             <a:r>
-              <a:rPr lang="en-US" sz="1400" b="1" kern="1200" dirty="0">
-                <a:solidFill>
-                  <a:schemeClr val="tx1"/>
-                </a:solidFill>
-                <a:effectLst/>
-                <a:latin typeface="+mn-lt"/>
-                <a:ea typeface="ＭＳ Ｐゴシック" pitchFamily="-106" charset="-128"/>
-                <a:cs typeface="ＭＳ Ｐゴシック" pitchFamily="-106" charset="-128"/>
-              </a:rPr>
+              <a:rPr lang="en-US" b="1" dirty="0"/>
               <a:t>Romans 4:13</a:t>
             </a:r>
             <a:r>
-              <a:rPr lang="en-US" sz="1400" kern="1200" dirty="0">
-                <a:solidFill>
-                  <a:schemeClr val="tx1"/>
-                </a:solidFill>
-                <a:effectLst/>
-                <a:latin typeface="+mn-lt"/>
-                <a:ea typeface="ＭＳ Ｐゴシック" pitchFamily="-106" charset="-128"/>
-                <a:cs typeface="ＭＳ Ｐゴシック" pitchFamily="-106" charset="-128"/>
-              </a:rPr>
+              <a:rPr lang="en-US" dirty="0"/>
               <a:t>  Abraham and his offspring receive “the promise that he would be heir of the world.”</a:t>
             </a:r>
           </a:p>
           <a:p>
             <a:pPr rtl="0" fontAlgn="ctr"/>
             <a:r>
-              <a:rPr lang="en-US" sz="1400" b="1" kern="1200" dirty="0">
-                <a:solidFill>
-                  <a:schemeClr val="tx1"/>
-                </a:solidFill>
-                <a:effectLst/>
-                <a:latin typeface="+mn-lt"/>
-                <a:ea typeface="ＭＳ Ｐゴシック" pitchFamily="-106" charset="-128"/>
-                <a:cs typeface="ＭＳ Ｐゴシック" pitchFamily="-106" charset="-128"/>
-              </a:rPr>
+              <a:rPr lang="en-US" b="1" dirty="0"/>
               <a:t>Hebrews 6:18–20</a:t>
             </a:r>
             <a:r>
-              <a:rPr lang="en-US" sz="1400" kern="1200" dirty="0">
-                <a:solidFill>
-                  <a:schemeClr val="tx1"/>
-                </a:solidFill>
-                <a:effectLst/>
-                <a:latin typeface="+mn-lt"/>
-                <a:ea typeface="ＭＳ Ｐゴシック" pitchFamily="-106" charset="-128"/>
-                <a:cs typeface="ＭＳ Ｐゴシック" pitchFamily="-106" charset="-128"/>
-              </a:rPr>
+              <a:rPr lang="en-US" dirty="0"/>
               <a:t>  The hope set before us is anchored in God’s unchangeable promise to Abraham.</a:t>
             </a:r>
           </a:p>
           <a:p>
             <a:pPr rtl="0" fontAlgn="ctr"/>
             <a:r>
-              <a:rPr lang="en-US" sz="1400" b="1" kern="1200" dirty="0">
-                <a:solidFill>
-                  <a:schemeClr val="tx1"/>
-                </a:solidFill>
-                <a:effectLst/>
-                <a:latin typeface="+mn-lt"/>
-                <a:ea typeface="ＭＳ Ｐゴシック" pitchFamily="-106" charset="-128"/>
-                <a:cs typeface="ＭＳ Ｐゴシック" pitchFamily="-106" charset="-128"/>
-              </a:rPr>
+              <a:rPr lang="en-US" b="1" dirty="0"/>
               <a:t>Hebrews 11:39–40 </a:t>
             </a:r>
             <a:r>
-              <a:rPr lang="en-US" sz="1400" kern="1200" dirty="0">
-                <a:solidFill>
-                  <a:schemeClr val="tx1"/>
-                </a:solidFill>
-                <a:effectLst/>
-                <a:latin typeface="+mn-lt"/>
-                <a:ea typeface="ＭＳ Ｐゴシック" pitchFamily="-106" charset="-128"/>
-                <a:cs typeface="ＭＳ Ｐゴシック" pitchFamily="-106" charset="-128"/>
-              </a:rPr>
+              <a:rPr lang="en-US" dirty="0"/>
               <a:t> The faithful, including Abraham, did not receive the promise in full, anticipating perfection in Christ.</a:t>
             </a:r>
           </a:p>
           <a:p>
             <a:pPr rtl="0" fontAlgn="ctr"/>
             <a:r>
-              <a:rPr lang="en-US" sz="1400" b="1" kern="1200" dirty="0">
-                <a:solidFill>
-                  <a:schemeClr val="tx1"/>
-                </a:solidFill>
-                <a:effectLst/>
-                <a:latin typeface="+mn-lt"/>
-                <a:ea typeface="ＭＳ Ｐゴシック" pitchFamily="-106" charset="-128"/>
-                <a:cs typeface="ＭＳ Ｐゴシック" pitchFamily="-106" charset="-128"/>
-              </a:rPr>
+              <a:rPr lang="en-US" b="1" dirty="0"/>
               <a:t>2 Peter 3:13</a:t>
             </a:r>
             <a:r>
-              <a:rPr lang="en-US" sz="1400" kern="1200" dirty="0">
-                <a:solidFill>
-                  <a:schemeClr val="tx1"/>
-                </a:solidFill>
-                <a:effectLst/>
-                <a:latin typeface="+mn-lt"/>
-                <a:ea typeface="ＭＳ Ｐゴシック" pitchFamily="-106" charset="-128"/>
-                <a:cs typeface="ＭＳ Ｐゴシック" pitchFamily="-106" charset="-128"/>
-              </a:rPr>
+              <a:rPr lang="en-US" dirty="0"/>
               <a:t>  The ultimate inheritance of the new heavens and new earth fulfills the faith of Abraham, the “heir of the world.”</a:t>
             </a:r>
           </a:p>
           <a:p>
-            <a:endParaRPr lang="en-US" sz="1400" dirty="0"/>
-          </a:p>
-          <a:p>
-            <a:endParaRPr lang="en-US" sz="1400" dirty="0"/>
-          </a:p>
-          <a:p>
-            <a:r>
-              <a:rPr lang="en-US" sz="1400" b="1" dirty="0"/>
-              <a:t>Summary </a:t>
-            </a:r>
-            <a:r>
-              <a:rPr lang="en-US" sz="1400" b="1" kern="1200" dirty="0">
-                <a:solidFill>
-                  <a:schemeClr val="tx1"/>
-                </a:solidFill>
-                <a:effectLst/>
-                <a:latin typeface="+mn-lt"/>
-                <a:ea typeface="ＭＳ Ｐゴシック" pitchFamily="-106" charset="-128"/>
-                <a:cs typeface="ＭＳ Ｐゴシック" pitchFamily="-106" charset="-128"/>
-              </a:rPr>
-              <a:t>Application Points</a:t>
-            </a:r>
-            <a:endParaRPr lang="en-US" sz="1400" kern="1200" dirty="0">
-              <a:solidFill>
-                <a:schemeClr val="tx1"/>
-              </a:solidFill>
-              <a:effectLst/>
-              <a:latin typeface="+mn-lt"/>
-              <a:ea typeface="ＭＳ Ｐゴシック" pitchFamily="-106" charset="-128"/>
-              <a:cs typeface="ＭＳ Ｐゴシック" pitchFamily="-106" charset="-128"/>
-            </a:endParaRPr>
+            <a:endParaRPr lang="en-US" dirty="0"/>
+          </a:p>
+          <a:p>
+            <a:endParaRPr lang="en-US" dirty="0"/>
+          </a:p>
+          <a:p>
+            <a:r>
+              <a:rPr lang="en-US" b="1" dirty="0"/>
+              <a:t>Summary Application Points</a:t>
+            </a:r>
+            <a:endParaRPr lang="en-US" dirty="0"/>
           </a:p>
           <a:p>
             <a:pPr rtl="0" fontAlgn="ctr"/>
             <a:r>
-              <a:rPr lang="en-US" sz="1400" b="1" kern="1200" dirty="0">
-                <a:solidFill>
-                  <a:schemeClr val="tx1"/>
-                </a:solidFill>
-                <a:effectLst/>
-                <a:latin typeface="+mn-lt"/>
-                <a:ea typeface="ＭＳ Ｐゴシック" pitchFamily="-106" charset="-128"/>
-                <a:cs typeface="ＭＳ Ｐゴシック" pitchFamily="-106" charset="-128"/>
-              </a:rPr>
+              <a:rPr lang="en-US" b="1" dirty="0"/>
               <a:t>Trust God’s Promises:</a:t>
             </a:r>
             <a:r>
-              <a:rPr lang="en-US" sz="1400" kern="1200" dirty="0">
-                <a:solidFill>
-                  <a:schemeClr val="tx1"/>
-                </a:solidFill>
-                <a:effectLst/>
-                <a:latin typeface="+mn-lt"/>
-                <a:ea typeface="ＭＳ Ｐゴシック" pitchFamily="-106" charset="-128"/>
-                <a:cs typeface="ＭＳ Ｐゴシック" pitchFamily="-106" charset="-128"/>
-              </a:rPr>
+              <a:rPr lang="en-US" dirty="0"/>
               <a:t> Identify one area in life that feels impossible (like Abraham’s childlessness) and bring it before God in faith.</a:t>
             </a:r>
           </a:p>
           <a:p>
             <a:pPr rtl="0" fontAlgn="ctr"/>
             <a:r>
-              <a:rPr lang="en-US" sz="1400" b="1" kern="1200" dirty="0">
-                <a:solidFill>
-                  <a:schemeClr val="tx1"/>
-                </a:solidFill>
-                <a:effectLst/>
-                <a:latin typeface="+mn-lt"/>
-                <a:ea typeface="ＭＳ Ｐゴシック" pitchFamily="-106" charset="-128"/>
-                <a:cs typeface="ＭＳ Ｐゴシック" pitchFamily="-106" charset="-128"/>
-              </a:rPr>
+              <a:rPr lang="en-US" b="1" dirty="0"/>
               <a:t>Embrace Identity:</a:t>
             </a:r>
             <a:r>
-              <a:rPr lang="en-US" sz="1400" kern="1200" dirty="0">
-                <a:solidFill>
-                  <a:schemeClr val="tx1"/>
-                </a:solidFill>
-                <a:effectLst/>
-                <a:latin typeface="+mn-lt"/>
-                <a:ea typeface="ＭＳ Ｐゴシック" pitchFamily="-106" charset="-128"/>
-                <a:cs typeface="ＭＳ Ｐゴシック" pitchFamily="-106" charset="-128"/>
-              </a:rPr>
+              <a:rPr lang="en-US" dirty="0"/>
               <a:t> Reflect on Galatians 3:29 - “If you are Christ’s, then you are Abraham’s offspring, heirs according to promise.”</a:t>
             </a:r>
           </a:p>
           <a:p>
             <a:pPr rtl="0" fontAlgn="ctr"/>
             <a:r>
-              <a:rPr lang="en-US" sz="1400" b="1" kern="1200" dirty="0">
-                <a:solidFill>
-                  <a:schemeClr val="tx1"/>
-                </a:solidFill>
-                <a:effectLst/>
-                <a:latin typeface="+mn-lt"/>
-                <a:ea typeface="ＭＳ Ｐゴシック" pitchFamily="-106" charset="-128"/>
-                <a:cs typeface="ＭＳ Ｐゴシック" pitchFamily="-106" charset="-128"/>
-              </a:rPr>
+              <a:rPr lang="en-US" b="1" dirty="0"/>
               <a:t>Be a Blessing:</a:t>
             </a:r>
             <a:r>
-              <a:rPr lang="en-US" sz="1400" kern="1200" dirty="0">
-                <a:solidFill>
-                  <a:schemeClr val="tx1"/>
-                </a:solidFill>
-                <a:effectLst/>
-                <a:latin typeface="+mn-lt"/>
-                <a:ea typeface="ＭＳ Ｐゴシック" pitchFamily="-106" charset="-128"/>
-                <a:cs typeface="ＭＳ Ｐゴシック" pitchFamily="-106" charset="-128"/>
-              </a:rPr>
+              <a:rPr lang="en-US" dirty="0"/>
               <a:t> Look for one practical way to bless someone outside your immediate circle (an unbeliever, a neighbor, someone from another culture).</a:t>
             </a:r>
           </a:p>
           <a:p>
             <a:pPr rtl="0" fontAlgn="ctr"/>
             <a:r>
-              <a:rPr lang="en-US" sz="1400" b="1" kern="1200" dirty="0">
-                <a:solidFill>
-                  <a:schemeClr val="tx1"/>
-                </a:solidFill>
-                <a:effectLst/>
-                <a:latin typeface="+mn-lt"/>
-                <a:ea typeface="ＭＳ Ｐゴシック" pitchFamily="-106" charset="-128"/>
-                <a:cs typeface="ＭＳ Ｐゴシック" pitchFamily="-106" charset="-128"/>
-              </a:rPr>
+              <a:rPr lang="en-US" b="1" dirty="0"/>
               <a:t>Global Vision:</a:t>
             </a:r>
             <a:r>
-              <a:rPr lang="en-US" sz="1400" kern="1200" dirty="0">
-                <a:solidFill>
-                  <a:schemeClr val="tx1"/>
-                </a:solidFill>
-                <a:effectLst/>
-                <a:latin typeface="+mn-lt"/>
-                <a:ea typeface="ＭＳ Ｐゴシック" pitchFamily="-106" charset="-128"/>
-                <a:cs typeface="ＭＳ Ｐゴシック" pitchFamily="-106" charset="-128"/>
-              </a:rPr>
+              <a:rPr lang="en-US" dirty="0"/>
               <a:t> Pray for one nation each day to receive the blessing of the gospel.</a:t>
             </a:r>
           </a:p>
@@ -1190,7 +1002,7 @@
           </a:bodyPr>
           <a:lstStyle/>
           <a:p>
-            <a:endParaRPr lang="en-US" sz="1400" dirty="0"/>
+            <a:endParaRPr lang="en-US" dirty="0"/>
           </a:p>
         </p:txBody>
       </p:sp>
@@ -1292,202 +1104,172 @@
           </a:p>
           <a:p>
             <a:r>
-              <a:rPr lang="en-US" sz="1400" b="1" dirty="0"/>
+              <a:rPr lang="en-US" b="1" dirty="0"/>
               <a:t>FIRST - Read Romans 3:21-26</a:t>
             </a:r>
           </a:p>
           <a:p>
-            <a:endParaRPr lang="en-US" sz="1400" dirty="0"/>
-          </a:p>
-          <a:p>
-            <a:r>
-              <a:rPr lang="en-US" sz="1400" b="1" dirty="0"/>
+            <a:endParaRPr lang="en-US" dirty="0"/>
+          </a:p>
+          <a:p>
+            <a:r>
+              <a:rPr lang="en-US" b="1" dirty="0"/>
               <a:t>THE QUESTION:</a:t>
             </a:r>
           </a:p>
           <a:p>
-            <a:pPr marL="147642" indent="-147642">
+            <a:pPr marL="123798" indent="-123798">
               <a:buFont typeface="Arial" pitchFamily="34" charset="0"/>
               <a:buChar char="•"/>
             </a:pPr>
             <a:r>
-              <a:rPr lang="en-US" sz="1400" dirty="0"/>
+              <a:rPr lang="en-US" dirty="0"/>
               <a:t>How can a perfectly </a:t>
             </a:r>
             <a:r>
-              <a:rPr lang="en-US" sz="1400" b="1" dirty="0"/>
+              <a:rPr lang="en-US" b="1" dirty="0"/>
               <a:t>just</a:t>
             </a:r>
             <a:r>
-              <a:rPr lang="en-US" sz="1400" dirty="0"/>
+              <a:rPr lang="en-US" dirty="0"/>
               <a:t> God forgive sins? </a:t>
             </a:r>
           </a:p>
           <a:p>
-            <a:pPr marL="147642" indent="-147642">
+            <a:pPr marL="123798" indent="-123798">
               <a:buFont typeface="Arial" pitchFamily="34" charset="0"/>
               <a:buChar char="•"/>
             </a:pPr>
             <a:r>
-              <a:rPr lang="en-US" sz="1400" dirty="0"/>
+              <a:rPr lang="en-US" dirty="0"/>
               <a:t>How can </a:t>
             </a:r>
             <a:r>
-              <a:rPr lang="en-US" sz="1400" b="1" dirty="0"/>
+              <a:rPr lang="en-US" b="1" dirty="0"/>
               <a:t>sinful</a:t>
             </a:r>
             <a:r>
-              <a:rPr lang="en-US" sz="1400" dirty="0"/>
+              <a:rPr lang="en-US" dirty="0"/>
               <a:t> man find favor with a </a:t>
             </a:r>
             <a:r>
-              <a:rPr lang="en-US" sz="1400" b="1" dirty="0"/>
+              <a:rPr lang="en-US" b="1" dirty="0"/>
               <a:t>righteous</a:t>
             </a:r>
             <a:r>
-              <a:rPr lang="en-US" sz="1400" dirty="0"/>
+              <a:rPr lang="en-US" dirty="0"/>
               <a:t> God?</a:t>
             </a:r>
           </a:p>
           <a:p>
-            <a:pPr marL="147642" indent="-147642">
+            <a:pPr marL="123798" indent="-123798">
               <a:buFont typeface="Arial" pitchFamily="34" charset="0"/>
               <a:buChar char="•"/>
             </a:pPr>
-            <a:endParaRPr lang="en-US" sz="1400" dirty="0"/>
-          </a:p>
-          <a:p>
-            <a:r>
-              <a:rPr lang="en-US" sz="1400" b="1" dirty="0"/>
+            <a:endParaRPr lang="en-US" dirty="0"/>
+          </a:p>
+          <a:p>
+            <a:r>
+              <a:rPr lang="en-US" b="1" dirty="0"/>
               <a:t>THE ANALOGY:</a:t>
             </a:r>
           </a:p>
           <a:p>
-            <a:pPr marL="147642" indent="-147642">
+            <a:pPr marL="123798" indent="-123798">
               <a:buFont typeface="Arial" pitchFamily="34" charset="0"/>
               <a:buChar char="•"/>
             </a:pPr>
             <a:r>
-              <a:rPr lang="en-US" sz="1400" dirty="0"/>
+              <a:rPr lang="en-US" dirty="0"/>
               <a:t>God (the Son) presides as the Judge of mankind (pagan, moral, and spiritual men).   John 5:22</a:t>
             </a:r>
           </a:p>
           <a:p>
-            <a:pPr marL="147642" indent="-147642">
+            <a:pPr marL="123798" indent="-123798">
               <a:buFont typeface="Arial" pitchFamily="34" charset="0"/>
               <a:buChar char="•"/>
             </a:pPr>
             <a:r>
-              <a:rPr lang="en-US" sz="1400" dirty="0"/>
+              <a:rPr lang="en-US" dirty="0"/>
               <a:t>The Son steps down from the Judgment seat and assumes the seat of the plaintiff (mankind).   Isaiah 53:11</a:t>
             </a:r>
           </a:p>
           <a:p>
-            <a:pPr marL="147642" indent="-147642">
+            <a:pPr marL="123798" indent="-123798">
               <a:buFont typeface="Arial" pitchFamily="34" charset="0"/>
               <a:buChar char="•"/>
             </a:pPr>
             <a:r>
-              <a:rPr lang="en-US" sz="1400" dirty="0"/>
+              <a:rPr lang="en-US" dirty="0"/>
               <a:t>The Son himself assumes the just penalty of sin for all of sinful mankind.    </a:t>
             </a:r>
           </a:p>
           <a:p>
-            <a:pPr marL="147642" indent="-147642">
+            <a:pPr marL="123798" indent="-123798">
               <a:buFont typeface="Arial" pitchFamily="34" charset="0"/>
               <a:buChar char="•"/>
             </a:pPr>
             <a:r>
-              <a:rPr lang="en-US" sz="1400" dirty="0"/>
+              <a:rPr lang="en-US" dirty="0"/>
               <a:t>The Father is satisfied with the just payment for sin. </a:t>
             </a:r>
           </a:p>
           <a:p>
-            <a:pPr marL="147642" indent="-147642" defTabSz="787426">
+            <a:pPr marL="123798" indent="-123798" defTabSz="660257">
               <a:buFont typeface="Arial" pitchFamily="34" charset="0"/>
               <a:buChar char="•"/>
               <a:defRPr/>
             </a:pPr>
             <a:r>
-              <a:rPr lang="en-US" sz="1400" dirty="0"/>
+              <a:rPr lang="en-US" dirty="0"/>
               <a:t>The Father demonstrates mercy by extending the righteousness of one man to cover many.      2 Cor. 5:21</a:t>
             </a:r>
           </a:p>
           <a:p>
-            <a:endParaRPr lang="en-US" sz="1400" dirty="0"/>
-          </a:p>
-          <a:p>
-            <a:r>
-              <a:rPr lang="en-US" sz="1400" b="1" dirty="0"/>
+            <a:endParaRPr lang="en-US" dirty="0"/>
+          </a:p>
+          <a:p>
+            <a:r>
+              <a:rPr lang="en-US" b="1" dirty="0"/>
               <a:t>God demonstrates His perfect justice at the same time that he demonstrates His perfect mercy…  in the act of delivering justice, he also justifies.</a:t>
             </a:r>
           </a:p>
           <a:p>
-            <a:endParaRPr lang="en-US" sz="1400" dirty="0"/>
-          </a:p>
-          <a:p>
-            <a:r>
-              <a:rPr lang="en-US" sz="1400" dirty="0"/>
+            <a:endParaRPr lang="en-US" dirty="0"/>
+          </a:p>
+          <a:p>
+            <a:r>
+              <a:rPr lang="en-US" dirty="0"/>
               <a:t>Eph. 2:8   “For by grace you have been saved through faith, and that not of yourselves; it is the gift of God, not of works, lest anyone should boast.</a:t>
             </a:r>
           </a:p>
           <a:p>
-            <a:endParaRPr lang="en-US" sz="1400" dirty="0"/>
-          </a:p>
-          <a:p>
-            <a:r>
-              <a:rPr lang="en-US" sz="1400" b="1" dirty="0"/>
+            <a:endParaRPr lang="en-US" dirty="0"/>
+          </a:p>
+          <a:p>
+            <a:r>
+              <a:rPr lang="en-US" b="1" dirty="0"/>
               <a:t>Hallelujah!   What a Savior!</a:t>
             </a:r>
           </a:p>
           <a:p>
-            <a:endParaRPr lang="en-US" sz="1400" b="1" dirty="0"/>
-          </a:p>
-          <a:p>
-            <a:endParaRPr lang="en-US" sz="1400" b="1" dirty="0"/>
-          </a:p>
-          <a:p>
-            <a:pPr marL="0" marR="0" lvl="0" indent="0" algn="l" defTabSz="914400" rtl="0" eaLnBrk="0" fontAlgn="base" latinLnBrk="0" hangingPunct="0">
-              <a:lnSpc>
-                <a:spcPct val="100000"/>
-              </a:lnSpc>
-              <a:spcBef>
-                <a:spcPct val="30000"/>
-              </a:spcBef>
-              <a:spcAft>
-                <a:spcPct val="0"/>
-              </a:spcAft>
-              <a:buClrTx/>
-              <a:buSzTx/>
-              <a:buFontTx/>
-              <a:buNone/>
-              <a:tabLst/>
+            <a:endParaRPr lang="en-US" b="1" dirty="0"/>
+          </a:p>
+          <a:p>
+            <a:endParaRPr lang="en-US" b="1" dirty="0"/>
+          </a:p>
+          <a:p>
+            <a:pPr defTabSz="766724">
               <a:defRPr/>
             </a:pPr>
             <a:r>
-              <a:rPr lang="en-US" sz="1200" b="1" kern="1200" dirty="0">
-                <a:solidFill>
-                  <a:schemeClr val="tx1"/>
-                </a:solidFill>
-                <a:effectLst/>
-                <a:latin typeface="+mn-lt"/>
-                <a:ea typeface="ＭＳ Ｐゴシック" pitchFamily="-106" charset="-128"/>
-                <a:cs typeface="ＭＳ Ｐゴシック" pitchFamily="-106" charset="-128"/>
-              </a:rPr>
+              <a:rPr lang="en-US" sz="1000" b="1" dirty="0"/>
               <a:t>God justifies sinners by faith, not by works, and Abraham is the pattern for all who believe.</a:t>
             </a:r>
-            <a:endParaRPr lang="en-US" sz="1200" kern="1200" dirty="0">
-              <a:solidFill>
-                <a:schemeClr val="tx1"/>
-              </a:solidFill>
-              <a:effectLst/>
-              <a:latin typeface="+mn-lt"/>
-              <a:ea typeface="ＭＳ Ｐゴシック" pitchFamily="-106" charset="-128"/>
-              <a:cs typeface="ＭＳ Ｐゴシック" pitchFamily="-106" charset="-128"/>
-            </a:endParaRPr>
-          </a:p>
-          <a:p>
-            <a:endParaRPr lang="en-US" sz="1400" b="1" dirty="0"/>
+            <a:endParaRPr lang="en-US" sz="1000" dirty="0"/>
+          </a:p>
+          <a:p>
+            <a:endParaRPr lang="en-US" b="1" dirty="0"/>
           </a:p>
         </p:txBody>
       </p:sp>
@@ -1578,394 +1360,120 @@
           <a:lstStyle/>
           <a:p>
             <a:r>
-              <a:rPr lang="en-US" sz="1200" b="1" kern="1200" dirty="0">
-                <a:solidFill>
-                  <a:schemeClr val="tx1"/>
-                </a:solidFill>
-                <a:effectLst/>
-                <a:latin typeface="+mn-lt"/>
-                <a:ea typeface="ＭＳ Ｐゴシック" pitchFamily="-106" charset="-128"/>
-                <a:cs typeface="ＭＳ Ｐゴシック" pitchFamily="-106" charset="-128"/>
-              </a:rPr>
+              <a:rPr lang="en-US" b="1" dirty="0"/>
               <a:t>Doctrinal Comparison Chart</a:t>
             </a:r>
             <a:r>
-              <a:rPr lang="en-US" sz="1200" b="0" kern="1200" dirty="0">
-                <a:solidFill>
-                  <a:schemeClr val="tx1"/>
-                </a:solidFill>
-                <a:effectLst/>
-                <a:latin typeface="+mn-lt"/>
-                <a:ea typeface="ＭＳ Ｐゴシック" pitchFamily="-106" charset="-128"/>
-                <a:cs typeface="ＭＳ Ｐゴシック" pitchFamily="-106" charset="-128"/>
-              </a:rPr>
+              <a:rPr lang="en-US" dirty="0"/>
               <a:t> - </a:t>
             </a:r>
             <a:r>
-              <a:rPr lang="en-US" sz="1200" b="1" kern="1200" dirty="0">
-                <a:solidFill>
-                  <a:schemeClr val="tx1"/>
-                </a:solidFill>
-                <a:effectLst/>
-                <a:latin typeface="+mn-lt"/>
-                <a:ea typeface="ＭＳ Ｐゴシック" pitchFamily="-106" charset="-128"/>
-                <a:cs typeface="ＭＳ Ｐゴシック" pitchFamily="-106" charset="-128"/>
-              </a:rPr>
+              <a:rPr lang="en-US" b="1" dirty="0"/>
               <a:t>Key Areas of Debate</a:t>
             </a:r>
-            <a:endParaRPr lang="en-US" sz="1200" kern="1200" dirty="0">
-              <a:solidFill>
-                <a:schemeClr val="tx1"/>
-              </a:solidFill>
-              <a:effectLst/>
-              <a:latin typeface="+mn-lt"/>
-              <a:ea typeface="ＭＳ Ｐゴシック" pitchFamily="-106" charset="-128"/>
-              <a:cs typeface="ＭＳ Ｐゴシック" pitchFamily="-106" charset="-128"/>
-            </a:endParaRPr>
-          </a:p>
-          <a:p>
             <a:endParaRPr lang="en-US" dirty="0"/>
           </a:p>
           <a:p>
-            <a:r>
-              <a:rPr lang="en-US" sz="1200" b="1" kern="1200" dirty="0">
-                <a:solidFill>
-                  <a:schemeClr val="tx1"/>
-                </a:solidFill>
-                <a:effectLst/>
-                <a:latin typeface="+mn-lt"/>
-                <a:ea typeface="ＭＳ Ｐゴシック" pitchFamily="-106" charset="-128"/>
-                <a:cs typeface="ＭＳ Ｐゴシック" pitchFamily="-106" charset="-128"/>
-              </a:rPr>
+            <a:endParaRPr lang="en-US" dirty="0"/>
+          </a:p>
+          <a:p>
+            <a:r>
+              <a:rPr lang="en-US" b="1" dirty="0"/>
               <a:t>Discussion Reflection</a:t>
             </a:r>
-            <a:endParaRPr lang="en-US" sz="1200" kern="1200" dirty="0">
-              <a:solidFill>
-                <a:schemeClr val="tx1"/>
-              </a:solidFill>
-              <a:effectLst/>
-              <a:latin typeface="+mn-lt"/>
-              <a:ea typeface="ＭＳ Ｐゴシック" pitchFamily="-106" charset="-128"/>
-              <a:cs typeface="ＭＳ Ｐゴシック" pitchFamily="-106" charset="-128"/>
-            </a:endParaRPr>
+            <a:endParaRPr lang="en-US" dirty="0"/>
           </a:p>
           <a:p>
             <a:pPr rtl="0" fontAlgn="ctr"/>
             <a:r>
-              <a:rPr lang="en-US" sz="1200" b="0" i="0" kern="1200" dirty="0">
-                <a:solidFill>
-                  <a:schemeClr val="tx1"/>
-                </a:solidFill>
-                <a:effectLst/>
-                <a:latin typeface="+mn-lt"/>
-                <a:ea typeface="ＭＳ Ｐゴシック" pitchFamily="-106" charset="-128"/>
-                <a:cs typeface="ＭＳ Ｐゴシック" pitchFamily="-106" charset="-128"/>
-              </a:rPr>
+              <a:rPr lang="en-US" dirty="0"/>
               <a:t>How does Romans define faith?</a:t>
             </a:r>
           </a:p>
           <a:p>
             <a:pPr rtl="0" fontAlgn="ctr"/>
             <a:r>
-              <a:rPr lang="en-US" sz="1200" b="0" i="0" kern="1200" dirty="0">
-                <a:solidFill>
-                  <a:schemeClr val="tx1"/>
-                </a:solidFill>
-                <a:effectLst/>
-                <a:latin typeface="+mn-lt"/>
-                <a:ea typeface="ＭＳ Ｐゴシック" pitchFamily="-106" charset="-128"/>
-                <a:cs typeface="ＭＳ Ｐゴシック" pitchFamily="-106" charset="-128"/>
-              </a:rPr>
+              <a:rPr lang="en-US" dirty="0"/>
               <a:t>What is the role of obedience?</a:t>
             </a:r>
           </a:p>
           <a:p>
             <a:pPr rtl="0" fontAlgn="ctr"/>
             <a:r>
-              <a:rPr lang="en-US" sz="1200" b="0" i="0" kern="1200" dirty="0">
-                <a:solidFill>
-                  <a:schemeClr val="tx1"/>
-                </a:solidFill>
-                <a:effectLst/>
-                <a:latin typeface="+mn-lt"/>
-                <a:ea typeface="ＭＳ Ｐゴシック" pitchFamily="-106" charset="-128"/>
-                <a:cs typeface="ＭＳ Ｐゴシック" pitchFamily="-106" charset="-128"/>
-              </a:rPr>
+              <a:rPr lang="en-US" dirty="0"/>
               <a:t>How do grace and obedience work together?</a:t>
             </a:r>
           </a:p>
           <a:p>
             <a:pPr rtl="0" fontAlgn="ctr"/>
             <a:r>
-              <a:rPr lang="en-US" sz="1200" b="0" i="0" kern="1200" dirty="0">
-                <a:solidFill>
-                  <a:schemeClr val="tx1"/>
-                </a:solidFill>
-                <a:effectLst/>
-                <a:latin typeface="+mn-lt"/>
-                <a:ea typeface="ＭＳ Ｐゴシック" pitchFamily="-106" charset="-128"/>
-                <a:cs typeface="ＭＳ Ｐゴシック" pitchFamily="-106" charset="-128"/>
-              </a:rPr>
+              <a:rPr lang="en-US" dirty="0"/>
               <a:t>What does it mean to be “in Christ”?</a:t>
             </a:r>
           </a:p>
           <a:p>
             <a:pPr rtl="0" fontAlgn="ctr"/>
             <a:r>
-              <a:rPr lang="en-US" sz="1200" b="0" i="0" kern="1200" dirty="0">
-                <a:solidFill>
-                  <a:schemeClr val="tx1"/>
-                </a:solidFill>
-                <a:effectLst/>
-                <a:latin typeface="+mn-lt"/>
-                <a:ea typeface="ＭＳ Ｐゴシック" pitchFamily="-106" charset="-128"/>
-                <a:cs typeface="ＭＳ Ｐゴシック" pitchFamily="-106" charset="-128"/>
-              </a:rPr>
+              <a:rPr lang="en-US" dirty="0"/>
               <a:t>How should this shape how you live?</a:t>
             </a:r>
           </a:p>
           <a:p>
             <a:r>
-              <a:rPr lang="en-US" sz="1200" kern="1200" dirty="0">
-                <a:solidFill>
-                  <a:schemeClr val="tx1"/>
-                </a:solidFill>
-                <a:effectLst/>
-                <a:latin typeface="+mn-lt"/>
-                <a:ea typeface="ＭＳ Ｐゴシック" pitchFamily="-106" charset="-128"/>
-                <a:cs typeface="ＭＳ Ｐゴシック" pitchFamily="-106" charset="-128"/>
-              </a:rPr>
+              <a:rPr lang="en-US" dirty="0"/>
               <a:t> </a:t>
             </a:r>
           </a:p>
           <a:p>
             <a:r>
-              <a:rPr lang="en-US" sz="1200" b="1" kern="1200" dirty="0">
-                <a:solidFill>
-                  <a:schemeClr val="tx1"/>
-                </a:solidFill>
-                <a:effectLst/>
-                <a:latin typeface="+mn-lt"/>
-                <a:ea typeface="ＭＳ Ｐゴシック" pitchFamily="-106" charset="-128"/>
-                <a:cs typeface="ＭＳ Ｐゴシック" pitchFamily="-106" charset="-128"/>
-              </a:rPr>
+              <a:rPr lang="en-US" b="1" dirty="0"/>
               <a:t>Two Ways of Understanding Salvation</a:t>
             </a:r>
-            <a:endParaRPr lang="en-US" sz="1200" kern="1200" dirty="0">
-              <a:solidFill>
-                <a:schemeClr val="tx1"/>
-              </a:solidFill>
-              <a:effectLst/>
-              <a:latin typeface="+mn-lt"/>
-              <a:ea typeface="ＭＳ Ｐゴシック" pitchFamily="-106" charset="-128"/>
-              <a:cs typeface="ＭＳ Ｐゴシック" pitchFamily="-106" charset="-128"/>
-            </a:endParaRPr>
+            <a:endParaRPr lang="en-US" dirty="0"/>
           </a:p>
           <a:p>
             <a:pPr rtl="0" fontAlgn="t"/>
             <a:r>
-              <a:rPr lang="en-US" sz="1200" b="1" kern="1200" dirty="0">
-                <a:solidFill>
-                  <a:schemeClr val="tx1"/>
-                </a:solidFill>
-                <a:effectLst/>
-                <a:latin typeface="+mn-lt"/>
-                <a:ea typeface="ＭＳ Ｐゴシック" pitchFamily="-106" charset="-128"/>
-                <a:cs typeface="ＭＳ Ｐゴシック" pitchFamily="-106" charset="-128"/>
-              </a:rPr>
+              <a:rPr lang="en-US" b="1" dirty="0"/>
               <a:t>Question</a:t>
             </a:r>
-            <a:endParaRPr lang="en-US" sz="1200" kern="1200" dirty="0">
-              <a:solidFill>
-                <a:schemeClr val="tx1"/>
-              </a:solidFill>
-              <a:effectLst/>
-              <a:latin typeface="+mn-lt"/>
-              <a:ea typeface="ＭＳ Ｐゴシック" pitchFamily="-106" charset="-128"/>
-              <a:cs typeface="ＭＳ Ｐゴシック" pitchFamily="-106" charset="-128"/>
-            </a:endParaRPr>
+            <a:r>
+              <a:rPr lang="en-US" dirty="0"/>
+              <a:t>		</a:t>
+            </a:r>
+            <a:r>
+              <a:rPr lang="en-US" b="1" dirty="0"/>
+              <a:t>Protestant Emphasis</a:t>
+            </a:r>
+            <a:r>
+              <a:rPr lang="en-US" dirty="0"/>
+              <a:t>		</a:t>
+            </a:r>
+            <a:r>
+              <a:rPr lang="en-US" b="1" dirty="0"/>
+              <a:t>Restoration Emphasis</a:t>
+            </a:r>
+            <a:endParaRPr lang="en-US" dirty="0"/>
           </a:p>
           <a:p>
             <a:pPr rtl="0" fontAlgn="t"/>
             <a:r>
-              <a:rPr lang="en-US" sz="1200" b="1" kern="1200" dirty="0">
-                <a:solidFill>
-                  <a:schemeClr val="tx1"/>
-                </a:solidFill>
-                <a:effectLst/>
-                <a:latin typeface="+mn-lt"/>
-                <a:ea typeface="ＭＳ Ｐゴシック" pitchFamily="-106" charset="-128"/>
-                <a:cs typeface="ＭＳ Ｐゴシック" pitchFamily="-106" charset="-128"/>
-              </a:rPr>
-              <a:t>Protestant Emphasis</a:t>
-            </a:r>
-            <a:endParaRPr lang="en-US" sz="1200" kern="1200" dirty="0">
-              <a:solidFill>
-                <a:schemeClr val="tx1"/>
-              </a:solidFill>
-              <a:effectLst/>
-              <a:latin typeface="+mn-lt"/>
-              <a:ea typeface="ＭＳ Ｐゴシック" pitchFamily="-106" charset="-128"/>
-              <a:cs typeface="ＭＳ Ｐゴシック" pitchFamily="-106" charset="-128"/>
-            </a:endParaRPr>
+              <a:rPr lang="en-US" dirty="0"/>
+              <a:t>What saves?		Faith alone			Grace through obedient faith</a:t>
+            </a:r>
           </a:p>
           <a:p>
             <a:pPr rtl="0" fontAlgn="t"/>
             <a:r>
-              <a:rPr lang="en-US" sz="1200" b="1" kern="1200" dirty="0">
-                <a:solidFill>
-                  <a:schemeClr val="tx1"/>
-                </a:solidFill>
-                <a:effectLst/>
-                <a:latin typeface="+mn-lt"/>
-                <a:ea typeface="ＭＳ Ｐゴシック" pitchFamily="-106" charset="-128"/>
-                <a:cs typeface="ＭＳ Ｐゴシック" pitchFamily="-106" charset="-128"/>
-              </a:rPr>
-              <a:t>Restoration Emphasis</a:t>
-            </a:r>
-            <a:endParaRPr lang="en-US" sz="1200" kern="1200" dirty="0">
-              <a:solidFill>
-                <a:schemeClr val="tx1"/>
-              </a:solidFill>
-              <a:effectLst/>
-              <a:latin typeface="+mn-lt"/>
-              <a:ea typeface="ＭＳ Ｐゴシック" pitchFamily="-106" charset="-128"/>
-              <a:cs typeface="ＭＳ Ｐゴシック" pitchFamily="-106" charset="-128"/>
-            </a:endParaRPr>
+              <a:rPr lang="en-US" dirty="0"/>
+              <a:t>When does salvation occur?	At belief			At response to gospel (faith, repentance, baptism)</a:t>
+            </a:r>
           </a:p>
           <a:p>
             <a:pPr rtl="0" fontAlgn="t"/>
             <a:r>
-              <a:rPr lang="en-US" sz="1200" kern="1200" dirty="0">
-                <a:solidFill>
-                  <a:schemeClr val="tx1"/>
-                </a:solidFill>
-                <a:effectLst/>
-                <a:latin typeface="+mn-lt"/>
-                <a:ea typeface="ＭＳ Ｐゴシック" pitchFamily="-106" charset="-128"/>
-                <a:cs typeface="ＭＳ Ｐゴシック" pitchFamily="-106" charset="-128"/>
-              </a:rPr>
-              <a:t>What saves?</a:t>
-            </a:r>
-          </a:p>
-          <a:p>
-            <a:pPr rtl="0" fontAlgn="t"/>
-            <a:r>
-              <a:rPr lang="en-US" sz="1200" kern="1200" dirty="0">
-                <a:solidFill>
-                  <a:schemeClr val="tx1"/>
-                </a:solidFill>
-                <a:effectLst/>
-                <a:latin typeface="+mn-lt"/>
-                <a:ea typeface="ＭＳ Ｐゴシック" pitchFamily="-106" charset="-128"/>
-                <a:cs typeface="ＭＳ Ｐゴシック" pitchFamily="-106" charset="-128"/>
-              </a:rPr>
-              <a:t>Faith alone</a:t>
-            </a:r>
-          </a:p>
-          <a:p>
-            <a:pPr rtl="0" fontAlgn="t"/>
-            <a:r>
-              <a:rPr lang="en-US" sz="1200" kern="1200" dirty="0">
-                <a:solidFill>
-                  <a:schemeClr val="tx1"/>
-                </a:solidFill>
-                <a:effectLst/>
-                <a:latin typeface="+mn-lt"/>
-                <a:ea typeface="ＭＳ Ｐゴシック" pitchFamily="-106" charset="-128"/>
-                <a:cs typeface="ＭＳ Ｐゴシック" pitchFamily="-106" charset="-128"/>
-              </a:rPr>
-              <a:t>Grace through obedient faith</a:t>
-            </a:r>
-          </a:p>
-          <a:p>
-            <a:pPr rtl="0" fontAlgn="t"/>
-            <a:r>
-              <a:rPr lang="en-US" sz="1200" kern="1200" dirty="0">
-                <a:solidFill>
-                  <a:schemeClr val="tx1"/>
-                </a:solidFill>
-                <a:effectLst/>
-                <a:latin typeface="+mn-lt"/>
-                <a:ea typeface="ＭＳ Ｐゴシック" pitchFamily="-106" charset="-128"/>
-                <a:cs typeface="ＭＳ Ｐゴシック" pitchFamily="-106" charset="-128"/>
-              </a:rPr>
-              <a:t>When does salvation occur?</a:t>
-            </a:r>
-          </a:p>
-          <a:p>
-            <a:pPr rtl="0" fontAlgn="t"/>
-            <a:r>
-              <a:rPr lang="en-US" sz="1200" kern="1200" dirty="0">
-                <a:solidFill>
-                  <a:schemeClr val="tx1"/>
-                </a:solidFill>
-                <a:effectLst/>
-                <a:latin typeface="+mn-lt"/>
-                <a:ea typeface="ＭＳ Ｐゴシック" pitchFamily="-106" charset="-128"/>
-                <a:cs typeface="ＭＳ Ｐゴシック" pitchFamily="-106" charset="-128"/>
-              </a:rPr>
-              <a:t>At belief</a:t>
-            </a:r>
-          </a:p>
-          <a:p>
-            <a:pPr rtl="0" fontAlgn="t"/>
-            <a:r>
-              <a:rPr lang="en-US" sz="1200" kern="1200" dirty="0">
-                <a:solidFill>
-                  <a:schemeClr val="tx1"/>
-                </a:solidFill>
-                <a:effectLst/>
-                <a:latin typeface="+mn-lt"/>
-                <a:ea typeface="ＭＳ Ｐゴシック" pitchFamily="-106" charset="-128"/>
-                <a:cs typeface="ＭＳ Ｐゴシック" pitchFamily="-106" charset="-128"/>
-              </a:rPr>
-              <a:t>At response to gospel (faith, repentance, baptism)</a:t>
-            </a:r>
-          </a:p>
-          <a:p>
-            <a:pPr rtl="0" fontAlgn="t"/>
-            <a:r>
-              <a:rPr lang="en-US" sz="1200" kern="1200" dirty="0">
-                <a:solidFill>
-                  <a:schemeClr val="tx1"/>
-                </a:solidFill>
-                <a:effectLst/>
-                <a:latin typeface="+mn-lt"/>
-                <a:ea typeface="ＭＳ Ｐゴシック" pitchFamily="-106" charset="-128"/>
-                <a:cs typeface="ＭＳ Ｐゴシック" pitchFamily="-106" charset="-128"/>
-              </a:rPr>
-              <a:t>What follows?</a:t>
-            </a:r>
-          </a:p>
-          <a:p>
-            <a:pPr rtl="0" fontAlgn="t"/>
-            <a:r>
-              <a:rPr lang="en-US" sz="1200" kern="1200" dirty="0">
-                <a:solidFill>
-                  <a:schemeClr val="tx1"/>
-                </a:solidFill>
-                <a:effectLst/>
-                <a:latin typeface="+mn-lt"/>
-                <a:ea typeface="ＭＳ Ｐゴシック" pitchFamily="-106" charset="-128"/>
-                <a:cs typeface="ＭＳ Ｐゴシック" pitchFamily="-106" charset="-128"/>
-              </a:rPr>
-              <a:t>Obedience as evidence</a:t>
-            </a:r>
-          </a:p>
-          <a:p>
-            <a:pPr rtl="0" fontAlgn="t"/>
-            <a:r>
-              <a:rPr lang="en-US" sz="1200" kern="1200" dirty="0">
-                <a:solidFill>
-                  <a:schemeClr val="tx1"/>
-                </a:solidFill>
-                <a:effectLst/>
-                <a:latin typeface="+mn-lt"/>
-                <a:ea typeface="ＭＳ Ｐゴシック" pitchFamily="-106" charset="-128"/>
-                <a:cs typeface="ＭＳ Ｐゴシック" pitchFamily="-106" charset="-128"/>
-              </a:rPr>
-              <a:t>Obedience as part of faith and ongoing life</a:t>
+              <a:rPr lang="en-US" dirty="0"/>
+              <a:t>What follows?		Obedience as evidence		Obedience as part of faith and ongoing life</a:t>
             </a:r>
           </a:p>
           <a:p>
@@ -2080,324 +1588,132 @@
           <a:lstStyle/>
           <a:p>
             <a:r>
-              <a:rPr lang="en-US" sz="1400" b="1" kern="1200" dirty="0">
-                <a:solidFill>
-                  <a:schemeClr val="tx1"/>
-                </a:solidFill>
-                <a:effectLst/>
-                <a:latin typeface="+mn-lt"/>
-                <a:ea typeface="ＭＳ Ｐゴシック" pitchFamily="-106" charset="-128"/>
-                <a:cs typeface="ＭＳ Ｐゴシック" pitchFamily="-106" charset="-128"/>
-              </a:rPr>
+              <a:rPr lang="en-US" b="1" dirty="0"/>
               <a:t>Two Paths in Romans</a:t>
             </a:r>
-            <a:endParaRPr lang="en-US" sz="1400" kern="1200" dirty="0">
-              <a:solidFill>
-                <a:schemeClr val="tx1"/>
-              </a:solidFill>
-              <a:effectLst/>
-              <a:latin typeface="+mn-lt"/>
-              <a:ea typeface="ＭＳ Ｐゴシック" pitchFamily="-106" charset="-128"/>
-              <a:cs typeface="ＭＳ Ｐゴシック" pitchFamily="-106" charset="-128"/>
-            </a:endParaRPr>
+            <a:endParaRPr lang="en-US" dirty="0"/>
           </a:p>
           <a:p>
             <a:pPr rtl="0" fontAlgn="t"/>
-            <a:endParaRPr lang="en-US" sz="1400" b="1" kern="1200" dirty="0">
-              <a:solidFill>
-                <a:schemeClr val="tx1"/>
-              </a:solidFill>
-              <a:effectLst/>
-              <a:latin typeface="+mn-lt"/>
-              <a:ea typeface="ＭＳ Ｐゴシック" pitchFamily="-106" charset="-128"/>
-              <a:cs typeface="ＭＳ Ｐゴシック" pitchFamily="-106" charset="-128"/>
-            </a:endParaRPr>
+            <a:endParaRPr lang="en-US" b="1" dirty="0"/>
           </a:p>
           <a:p>
             <a:pPr rtl="0" fontAlgn="t"/>
             <a:r>
-              <a:rPr lang="en-US" sz="1400" b="1" i="0" u="sng" kern="1200" dirty="0">
-                <a:solidFill>
-                  <a:schemeClr val="tx1"/>
-                </a:solidFill>
-                <a:effectLst/>
-                <a:latin typeface="+mn-lt"/>
-                <a:ea typeface="ＭＳ Ｐゴシック" pitchFamily="-106" charset="-128"/>
-                <a:cs typeface="ＭＳ Ｐゴシック" pitchFamily="-106" charset="-128"/>
-              </a:rPr>
+              <a:rPr lang="en-US" b="1" u="sng" dirty="0"/>
               <a:t>Path</a:t>
             </a:r>
             <a:r>
-              <a:rPr lang="en-US" sz="1400" b="0" kern="1200" dirty="0">
-                <a:solidFill>
-                  <a:schemeClr val="tx1"/>
-                </a:solidFill>
-                <a:effectLst/>
-                <a:latin typeface="+mn-lt"/>
-                <a:ea typeface="ＭＳ Ｐゴシック" pitchFamily="-106" charset="-128"/>
-                <a:cs typeface="ＭＳ Ｐゴシック" pitchFamily="-106" charset="-128"/>
-              </a:rPr>
+              <a:rPr lang="en-US" dirty="0"/>
               <a:t>		</a:t>
             </a:r>
             <a:r>
-              <a:rPr lang="en-US" sz="1400" b="1" u="sng" kern="1200" dirty="0">
-                <a:solidFill>
-                  <a:schemeClr val="tx1"/>
-                </a:solidFill>
-                <a:effectLst/>
-                <a:latin typeface="+mn-lt"/>
-                <a:ea typeface="ＭＳ Ｐゴシック" pitchFamily="-106" charset="-128"/>
-                <a:cs typeface="ＭＳ Ｐゴシック" pitchFamily="-106" charset="-128"/>
-              </a:rPr>
+              <a:rPr lang="en-US" b="1" u="sng" dirty="0"/>
               <a:t>Description</a:t>
             </a:r>
             <a:r>
-              <a:rPr lang="en-US" sz="1400" b="0" kern="1200" dirty="0">
-                <a:solidFill>
-                  <a:schemeClr val="tx1"/>
-                </a:solidFill>
-                <a:effectLst/>
-                <a:latin typeface="+mn-lt"/>
-                <a:ea typeface="ＭＳ Ｐゴシック" pitchFamily="-106" charset="-128"/>
-                <a:cs typeface="ＭＳ Ｐゴシック" pitchFamily="-106" charset="-128"/>
-              </a:rPr>
+              <a:rPr lang="en-US" dirty="0"/>
               <a:t>			</a:t>
             </a:r>
             <a:r>
-              <a:rPr lang="en-US" sz="1400" b="1" u="sng" kern="1200" dirty="0">
-                <a:solidFill>
-                  <a:schemeClr val="tx1"/>
-                </a:solidFill>
-                <a:effectLst/>
-                <a:latin typeface="+mn-lt"/>
-                <a:ea typeface="ＭＳ Ｐゴシック" pitchFamily="-106" charset="-128"/>
-                <a:cs typeface="ＭＳ Ｐゴシック" pitchFamily="-106" charset="-128"/>
-              </a:rPr>
+              <a:rPr lang="en-US" b="1" u="sng" dirty="0"/>
               <a:t>Key Verses</a:t>
             </a:r>
             <a:r>
-              <a:rPr lang="en-US" sz="1400" b="0" kern="1200" dirty="0">
-                <a:solidFill>
-                  <a:schemeClr val="tx1"/>
-                </a:solidFill>
-                <a:effectLst/>
-                <a:latin typeface="+mn-lt"/>
-                <a:ea typeface="ＭＳ Ｐゴシック" pitchFamily="-106" charset="-128"/>
-                <a:cs typeface="ＭＳ Ｐゴシック" pitchFamily="-106" charset="-128"/>
-              </a:rPr>
+              <a:rPr lang="en-US" dirty="0"/>
               <a:t>		</a:t>
             </a:r>
           </a:p>
           <a:p>
             <a:pPr rtl="0" fontAlgn="t"/>
             <a:r>
-              <a:rPr lang="en-US" sz="1400" b="1" kern="1200" dirty="0">
-                <a:solidFill>
-                  <a:schemeClr val="tx1"/>
-                </a:solidFill>
-                <a:effectLst/>
-                <a:latin typeface="+mn-lt"/>
-                <a:ea typeface="ＭＳ Ｐゴシック" pitchFamily="-106" charset="-128"/>
-                <a:cs typeface="ＭＳ Ｐゴシック" pitchFamily="-106" charset="-128"/>
-              </a:rPr>
+              <a:rPr lang="en-US" b="1" dirty="0"/>
               <a:t>Man’s Righteousness   	</a:t>
             </a:r>
             <a:r>
-              <a:rPr lang="en-US" sz="1400" kern="1200" dirty="0">
-                <a:solidFill>
-                  <a:schemeClr val="tx1"/>
-                </a:solidFill>
-                <a:effectLst/>
-                <a:latin typeface="+mn-lt"/>
-                <a:ea typeface="ＭＳ Ｐゴシック" pitchFamily="-106" charset="-128"/>
-                <a:cs typeface="ＭＳ Ｐゴシック" pitchFamily="-106" charset="-128"/>
-              </a:rPr>
+              <a:rPr lang="en-US" dirty="0"/>
               <a:t>Self-trust, works, law-keeping		Romans 10:3</a:t>
             </a:r>
           </a:p>
           <a:p>
             <a:pPr rtl="0" fontAlgn="t"/>
             <a:r>
-              <a:rPr lang="en-US" sz="1400" b="1" kern="1200" dirty="0">
-                <a:solidFill>
-                  <a:schemeClr val="tx1"/>
-                </a:solidFill>
-                <a:effectLst/>
-                <a:latin typeface="+mn-lt"/>
-                <a:ea typeface="ＭＳ Ｐゴシック" pitchFamily="-106" charset="-128"/>
-                <a:cs typeface="ＭＳ Ｐゴシック" pitchFamily="-106" charset="-128"/>
-              </a:rPr>
+              <a:rPr lang="en-US" b="1" dirty="0"/>
               <a:t>God’s Righteousness	</a:t>
             </a:r>
             <a:r>
-              <a:rPr lang="en-US" sz="1400" kern="1200" dirty="0">
-                <a:solidFill>
-                  <a:schemeClr val="tx1"/>
-                </a:solidFill>
-                <a:effectLst/>
-                <a:latin typeface="+mn-lt"/>
-                <a:ea typeface="ＭＳ Ｐゴシック" pitchFamily="-106" charset="-128"/>
-                <a:cs typeface="ＭＳ Ｐゴシック" pitchFamily="-106" charset="-128"/>
-              </a:rPr>
+              <a:rPr lang="en-US" dirty="0"/>
               <a:t>Grace, faith, Christ, new life		Romans 3:22</a:t>
             </a:r>
           </a:p>
           <a:p>
             <a:pPr lvl="0"/>
-            <a:endParaRPr lang="en-US" sz="1400" dirty="0"/>
-          </a:p>
-          <a:p>
-            <a:r>
-              <a:rPr lang="en-US" sz="1400" b="1" u="sng" kern="1200" dirty="0">
-                <a:solidFill>
-                  <a:schemeClr val="tx1"/>
-                </a:solidFill>
-                <a:effectLst/>
-                <a:latin typeface="+mn-lt"/>
-                <a:ea typeface="ＭＳ Ｐゴシック" pitchFamily="-106" charset="-128"/>
-                <a:cs typeface="ＭＳ Ｐゴシック" pitchFamily="-106" charset="-128"/>
-              </a:rPr>
+            <a:endParaRPr lang="en-US" dirty="0"/>
+          </a:p>
+          <a:p>
+            <a:r>
+              <a:rPr lang="en-US" b="1" u="sng" dirty="0"/>
               <a:t>Simple Summary</a:t>
             </a:r>
-            <a:endParaRPr lang="en-US" sz="1400" u="sng" kern="1200" dirty="0">
-              <a:solidFill>
-                <a:schemeClr val="tx1"/>
-              </a:solidFill>
-              <a:effectLst/>
-              <a:latin typeface="+mn-lt"/>
-              <a:ea typeface="ＭＳ Ｐゴシック" pitchFamily="-106" charset="-128"/>
-              <a:cs typeface="ＭＳ Ｐゴシック" pitchFamily="-106" charset="-128"/>
-            </a:endParaRPr>
+            <a:endParaRPr lang="en-US" u="sng" dirty="0"/>
           </a:p>
           <a:p>
             <a:pPr rtl="0" fontAlgn="ctr"/>
             <a:r>
-              <a:rPr lang="en-US" sz="1400" kern="1200" dirty="0">
-                <a:solidFill>
-                  <a:schemeClr val="tx1"/>
-                </a:solidFill>
-                <a:effectLst/>
-                <a:latin typeface="+mn-lt"/>
-                <a:ea typeface="ＭＳ Ｐゴシック" pitchFamily="-106" charset="-128"/>
-                <a:cs typeface="ＭＳ Ｐゴシック" pitchFamily="-106" charset="-128"/>
-              </a:rPr>
+              <a:rPr lang="en-US" dirty="0"/>
               <a:t>All agree: salvation is by grace</a:t>
             </a:r>
           </a:p>
           <a:p>
             <a:pPr rtl="0" fontAlgn="ctr"/>
             <a:r>
-              <a:rPr lang="en-US" sz="1400" kern="1200" dirty="0">
-                <a:solidFill>
-                  <a:schemeClr val="tx1"/>
-                </a:solidFill>
-                <a:effectLst/>
-                <a:latin typeface="+mn-lt"/>
-                <a:ea typeface="ＭＳ Ｐゴシック" pitchFamily="-106" charset="-128"/>
-                <a:cs typeface="ＭＳ Ｐゴシック" pitchFamily="-106" charset="-128"/>
-              </a:rPr>
+              <a:rPr lang="en-US" dirty="0"/>
               <a:t>The main difference: </a:t>
             </a:r>
             <a:r>
-              <a:rPr lang="en-US" sz="1400" b="1" kern="1200" dirty="0">
-                <a:solidFill>
-                  <a:schemeClr val="tx1"/>
-                </a:solidFill>
-                <a:effectLst/>
-                <a:latin typeface="+mn-lt"/>
-                <a:ea typeface="ＭＳ Ｐゴシック" pitchFamily="-106" charset="-128"/>
-                <a:cs typeface="ＭＳ Ｐゴシック" pitchFamily="-106" charset="-128"/>
-              </a:rPr>
+              <a:rPr lang="en-US" b="1" dirty="0"/>
               <a:t>what faith includes</a:t>
             </a:r>
-            <a:endParaRPr lang="en-US" sz="1400" kern="1200" dirty="0">
-              <a:solidFill>
-                <a:schemeClr val="tx1"/>
-              </a:solidFill>
-              <a:effectLst/>
-              <a:latin typeface="+mn-lt"/>
-              <a:ea typeface="ＭＳ Ｐゴシック" pitchFamily="-106" charset="-128"/>
-              <a:cs typeface="ＭＳ Ｐゴシック" pitchFamily="-106" charset="-128"/>
-            </a:endParaRPr>
+            <a:endParaRPr lang="en-US" dirty="0"/>
           </a:p>
           <a:p>
             <a:pPr rtl="0" fontAlgn="ctr"/>
             <a:r>
-              <a:rPr lang="en-US" sz="1400" kern="1200" dirty="0">
-                <a:solidFill>
-                  <a:schemeClr val="tx1"/>
-                </a:solidFill>
-                <a:effectLst/>
-                <a:latin typeface="+mn-lt"/>
-                <a:ea typeface="ＭＳ Ｐゴシック" pitchFamily="-106" charset="-128"/>
-                <a:cs typeface="ＭＳ Ｐゴシック" pitchFamily="-106" charset="-128"/>
-              </a:rPr>
+              <a:rPr lang="en-US" dirty="0"/>
               <a:t>Romans calls for:</a:t>
             </a:r>
           </a:p>
           <a:p>
             <a:pPr lvl="1" rtl="0" fontAlgn="ctr"/>
             <a:r>
-              <a:rPr lang="en-US" sz="1400" kern="1200" dirty="0">
-                <a:solidFill>
-                  <a:schemeClr val="tx1"/>
-                </a:solidFill>
-                <a:effectLst/>
-                <a:latin typeface="+mn-lt"/>
-                <a:ea typeface="ＭＳ Ｐゴシック" pitchFamily="-106" charset="-128"/>
-                <a:cs typeface="+mn-cs"/>
-              </a:rPr>
+              <a:rPr lang="en-US" dirty="0"/>
               <a:t>faith</a:t>
             </a:r>
           </a:p>
           <a:p>
             <a:pPr lvl="1" rtl="0" fontAlgn="ctr"/>
             <a:r>
-              <a:rPr lang="en-US" sz="1400" kern="1200" dirty="0">
-                <a:solidFill>
-                  <a:schemeClr val="tx1"/>
-                </a:solidFill>
-                <a:effectLst/>
-                <a:latin typeface="+mn-lt"/>
-                <a:ea typeface="ＭＳ Ｐゴシック" pitchFamily="-106" charset="-128"/>
-                <a:cs typeface="+mn-cs"/>
-              </a:rPr>
+              <a:rPr lang="en-US" dirty="0"/>
               <a:t>submission</a:t>
             </a:r>
           </a:p>
           <a:p>
             <a:pPr lvl="1" rtl="0" fontAlgn="ctr"/>
             <a:r>
-              <a:rPr lang="en-US" sz="1400" kern="1200" dirty="0">
-                <a:solidFill>
-                  <a:schemeClr val="tx1"/>
-                </a:solidFill>
-                <a:effectLst/>
-                <a:latin typeface="+mn-lt"/>
-                <a:ea typeface="ＭＳ Ｐゴシック" pitchFamily="-106" charset="-128"/>
-                <a:cs typeface="+mn-cs"/>
-              </a:rPr>
+              <a:rPr lang="en-US" dirty="0"/>
               <a:t>transformation</a:t>
             </a:r>
           </a:p>
           <a:p>
             <a:pPr lvl="1" rtl="0" fontAlgn="ctr"/>
             <a:r>
-              <a:rPr lang="en-US" sz="1400" kern="1200" dirty="0">
-                <a:solidFill>
-                  <a:schemeClr val="tx1"/>
-                </a:solidFill>
-                <a:effectLst/>
-                <a:latin typeface="+mn-lt"/>
-                <a:ea typeface="ＭＳ Ｐゴシック" pitchFamily="-106" charset="-128"/>
-                <a:cs typeface="+mn-cs"/>
-              </a:rPr>
+              <a:rPr lang="en-US" dirty="0"/>
               <a:t>perseverance</a:t>
             </a:r>
           </a:p>
           <a:p>
             <a:pPr lvl="0"/>
-            <a:endParaRPr lang="en-US" sz="1400" dirty="0"/>
+            <a:endParaRPr lang="en-US" dirty="0"/>
           </a:p>
         </p:txBody>
       </p:sp>
@@ -2496,455 +1812,185 @@
           <a:lstStyle/>
           <a:p>
             <a:r>
-              <a:rPr lang="en-US" sz="1400" b="1" kern="1200" dirty="0">
-                <a:solidFill>
-                  <a:schemeClr val="tx1"/>
-                </a:solidFill>
-                <a:effectLst/>
-                <a:latin typeface="+mn-lt"/>
-                <a:ea typeface="ＭＳ Ｐゴシック" pitchFamily="-106" charset="-128"/>
-                <a:cs typeface="ＭＳ Ｐゴシック" pitchFamily="-106" charset="-128"/>
-              </a:rPr>
+              <a:rPr lang="en-US" b="1" dirty="0"/>
               <a:t>God’s Character in the Promise to Abraham</a:t>
             </a:r>
-            <a:endParaRPr lang="en-US" sz="1400" kern="1200" dirty="0">
-              <a:solidFill>
-                <a:schemeClr val="tx1"/>
-              </a:solidFill>
-              <a:effectLst/>
-              <a:latin typeface="+mn-lt"/>
-              <a:ea typeface="ＭＳ Ｐゴシック" pitchFamily="-106" charset="-128"/>
-              <a:cs typeface="ＭＳ Ｐゴシック" pitchFamily="-106" charset="-128"/>
-            </a:endParaRPr>
+            <a:endParaRPr lang="en-US" dirty="0"/>
           </a:p>
           <a:p>
             <a:pPr rtl="0" fontAlgn="ctr"/>
-            <a:r>
-              <a:rPr lang="en-US" sz="1400" b="1" kern="1200" dirty="0">
-                <a:solidFill>
-                  <a:schemeClr val="tx1"/>
-                </a:solidFill>
-                <a:effectLst/>
-                <a:latin typeface="+mn-lt"/>
-                <a:ea typeface="ＭＳ Ｐゴシック" pitchFamily="-106" charset="-128"/>
-                <a:cs typeface="ＭＳ Ｐゴシック" pitchFamily="-106" charset="-128"/>
-              </a:rPr>
+            <a:endParaRPr lang="en-US" b="1" dirty="0"/>
+          </a:p>
+          <a:p>
+            <a:pPr rtl="0" fontAlgn="ctr"/>
+            <a:r>
+              <a:rPr lang="en-US" b="1" dirty="0"/>
               <a:t>Initiator of the Covenant</a:t>
             </a:r>
-            <a:endParaRPr lang="en-US" sz="1400" kern="1200" dirty="0">
-              <a:solidFill>
-                <a:schemeClr val="tx1"/>
-              </a:solidFill>
-              <a:effectLst/>
-              <a:latin typeface="+mn-lt"/>
-              <a:ea typeface="ＭＳ Ｐゴシック" pitchFamily="-106" charset="-128"/>
-              <a:cs typeface="ＭＳ Ｐゴシック" pitchFamily="-106" charset="-128"/>
-            </a:endParaRPr>
+            <a:endParaRPr lang="en-US" dirty="0"/>
           </a:p>
           <a:p>
             <a:pPr lvl="1" rtl="0" fontAlgn="ctr"/>
             <a:r>
-              <a:rPr lang="en-US" sz="1400" i="1" kern="1200" dirty="0">
-                <a:solidFill>
-                  <a:schemeClr val="tx1"/>
-                </a:solidFill>
-                <a:effectLst/>
-                <a:latin typeface="+mn-lt"/>
-                <a:ea typeface="ＭＳ Ｐゴシック" pitchFamily="-106" charset="-128"/>
-                <a:cs typeface="+mn-cs"/>
-              </a:rPr>
+              <a:rPr lang="en-US" i="1" dirty="0"/>
               <a:t>Genesis 12:1–3</a:t>
             </a:r>
             <a:r>
-              <a:rPr lang="en-US" sz="1400" kern="1200" dirty="0">
-                <a:solidFill>
-                  <a:schemeClr val="tx1"/>
-                </a:solidFill>
-                <a:effectLst/>
-                <a:latin typeface="+mn-lt"/>
-                <a:ea typeface="ＭＳ Ｐゴシック" pitchFamily="-106" charset="-128"/>
-                <a:cs typeface="+mn-cs"/>
-              </a:rPr>
+              <a:rPr lang="en-US" dirty="0"/>
               <a:t>  God calls Abraham to leave his homeland, initiating the promise.</a:t>
             </a:r>
           </a:p>
           <a:p>
             <a:pPr lvl="1" rtl="0" fontAlgn="ctr"/>
             <a:r>
-              <a:rPr lang="en-US" sz="1400" kern="1200" dirty="0">
-                <a:solidFill>
-                  <a:schemeClr val="tx1"/>
-                </a:solidFill>
-                <a:effectLst/>
-                <a:latin typeface="+mn-lt"/>
-                <a:ea typeface="ＭＳ Ｐゴシック" pitchFamily="-106" charset="-128"/>
-                <a:cs typeface="+mn-cs"/>
-              </a:rPr>
+              <a:rPr lang="en-US" dirty="0"/>
               <a:t>God’s promises are grounded in His initiative, not Abraham’s worthiness.</a:t>
             </a:r>
           </a:p>
           <a:p>
             <a:pPr rtl="0" fontAlgn="ctr"/>
             <a:r>
-              <a:rPr lang="en-US" sz="1400" b="1" kern="1200" dirty="0">
-                <a:solidFill>
-                  <a:schemeClr val="tx1"/>
-                </a:solidFill>
-                <a:effectLst/>
-                <a:latin typeface="+mn-lt"/>
-                <a:ea typeface="ＭＳ Ｐゴシック" pitchFamily="-106" charset="-128"/>
-                <a:cs typeface="ＭＳ Ｐゴシック" pitchFamily="-106" charset="-128"/>
-              </a:rPr>
+              <a:rPr lang="en-US" b="1" dirty="0"/>
               <a:t>Covenant Keeper</a:t>
             </a:r>
-            <a:endParaRPr lang="en-US" sz="1400" kern="1200" dirty="0">
-              <a:solidFill>
-                <a:schemeClr val="tx1"/>
-              </a:solidFill>
-              <a:effectLst/>
-              <a:latin typeface="+mn-lt"/>
-              <a:ea typeface="ＭＳ Ｐゴシック" pitchFamily="-106" charset="-128"/>
-              <a:cs typeface="ＭＳ Ｐゴシック" pitchFamily="-106" charset="-128"/>
-            </a:endParaRPr>
+            <a:endParaRPr lang="en-US" dirty="0"/>
           </a:p>
           <a:p>
             <a:pPr lvl="1" rtl="0" fontAlgn="ctr"/>
             <a:r>
-              <a:rPr lang="en-US" sz="1400" i="1" kern="1200" dirty="0">
-                <a:solidFill>
-                  <a:schemeClr val="tx1"/>
-                </a:solidFill>
-                <a:effectLst/>
-                <a:latin typeface="+mn-lt"/>
-                <a:ea typeface="ＭＳ Ｐゴシック" pitchFamily="-106" charset="-128"/>
-                <a:cs typeface="+mn-cs"/>
-              </a:rPr>
+              <a:rPr lang="en-US" i="1" dirty="0"/>
               <a:t>Genesis 15:1–6</a:t>
             </a:r>
             <a:r>
-              <a:rPr lang="en-US" sz="1400" kern="1200" dirty="0">
-                <a:solidFill>
-                  <a:schemeClr val="tx1"/>
-                </a:solidFill>
-                <a:effectLst/>
-                <a:latin typeface="+mn-lt"/>
-                <a:ea typeface="ＭＳ Ｐゴシック" pitchFamily="-106" charset="-128"/>
-                <a:cs typeface="+mn-cs"/>
-              </a:rPr>
+              <a:rPr lang="en-US" dirty="0"/>
               <a:t>   God ratifies the covenant by passing between the pieces, showing He alone carries the responsibility of fulfillment.</a:t>
             </a:r>
           </a:p>
           <a:p>
             <a:pPr lvl="1" rtl="0" fontAlgn="ctr"/>
             <a:r>
-              <a:rPr lang="en-US" sz="1400" i="1" kern="1200" dirty="0">
-                <a:solidFill>
-                  <a:schemeClr val="tx1"/>
-                </a:solidFill>
-                <a:effectLst/>
-                <a:latin typeface="+mn-lt"/>
-                <a:ea typeface="ＭＳ Ｐゴシック" pitchFamily="-106" charset="-128"/>
-                <a:cs typeface="+mn-cs"/>
-              </a:rPr>
+              <a:rPr lang="en-US" i="1" dirty="0"/>
               <a:t>Genesis 17:7</a:t>
             </a:r>
             <a:r>
-              <a:rPr lang="en-US" sz="1400" kern="1200" dirty="0">
-                <a:solidFill>
-                  <a:schemeClr val="tx1"/>
-                </a:solidFill>
-                <a:effectLst/>
-                <a:latin typeface="+mn-lt"/>
-                <a:ea typeface="ＭＳ Ｐゴシック" pitchFamily="-106" charset="-128"/>
-                <a:cs typeface="+mn-cs"/>
-              </a:rPr>
+              <a:rPr lang="en-US" dirty="0"/>
               <a:t>   God calls it an “everlasting covenant.”</a:t>
             </a:r>
           </a:p>
           <a:p>
             <a:pPr rtl="0" fontAlgn="ctr"/>
             <a:r>
-              <a:rPr lang="en-US" sz="1400" b="1" kern="1200" dirty="0">
-                <a:solidFill>
-                  <a:schemeClr val="tx1"/>
-                </a:solidFill>
-                <a:effectLst/>
-                <a:latin typeface="+mn-lt"/>
-                <a:ea typeface="ＭＳ Ｐゴシック" pitchFamily="-106" charset="-128"/>
-                <a:cs typeface="ＭＳ Ｐゴシック" pitchFamily="-106" charset="-128"/>
-              </a:rPr>
+              <a:rPr lang="en-US" b="1" dirty="0"/>
               <a:t>Faithfulness Across Generations</a:t>
             </a:r>
-            <a:endParaRPr lang="en-US" sz="1400" kern="1200" dirty="0">
-              <a:solidFill>
-                <a:schemeClr val="tx1"/>
-              </a:solidFill>
-              <a:effectLst/>
-              <a:latin typeface="+mn-lt"/>
-              <a:ea typeface="ＭＳ Ｐゴシック" pitchFamily="-106" charset="-128"/>
-              <a:cs typeface="ＭＳ Ｐゴシック" pitchFamily="-106" charset="-128"/>
-            </a:endParaRPr>
+            <a:endParaRPr lang="en-US" dirty="0"/>
           </a:p>
           <a:p>
             <a:pPr lvl="1" rtl="0" fontAlgn="ctr"/>
             <a:r>
-              <a:rPr lang="en-US" sz="1400" kern="1200" dirty="0">
-                <a:solidFill>
-                  <a:schemeClr val="tx1"/>
-                </a:solidFill>
-                <a:effectLst/>
-                <a:latin typeface="+mn-lt"/>
-                <a:ea typeface="ＭＳ Ｐゴシック" pitchFamily="-106" charset="-128"/>
-                <a:cs typeface="+mn-cs"/>
-              </a:rPr>
+              <a:rPr lang="en-US" dirty="0"/>
               <a:t>God reiterates His promise to Isaac (Genesis 26:3–4) and Jacob (Genesis 28:13–15).</a:t>
             </a:r>
           </a:p>
           <a:p>
-            <a:endParaRPr lang="en-US" sz="1400" b="1" kern="1200" dirty="0">
-              <a:solidFill>
-                <a:schemeClr val="tx1"/>
-              </a:solidFill>
-              <a:effectLst/>
-              <a:latin typeface="+mn-lt"/>
-              <a:ea typeface="ＭＳ Ｐゴシック" pitchFamily="-106" charset="-128"/>
-              <a:cs typeface="ＭＳ Ｐゴシック" pitchFamily="-106" charset="-128"/>
-            </a:endParaRPr>
-          </a:p>
-          <a:p>
-            <a:r>
-              <a:rPr lang="en-US" sz="1400" b="1" kern="1200" dirty="0">
-                <a:solidFill>
-                  <a:schemeClr val="tx1"/>
-                </a:solidFill>
-                <a:effectLst/>
-                <a:latin typeface="+mn-lt"/>
-                <a:ea typeface="ＭＳ Ｐゴシック" pitchFamily="-106" charset="-128"/>
-                <a:cs typeface="ＭＳ Ｐゴシック" pitchFamily="-106" charset="-128"/>
-              </a:rPr>
+            <a:endParaRPr lang="en-US" b="1" dirty="0"/>
+          </a:p>
+          <a:p>
+            <a:r>
+              <a:rPr lang="en-US" b="1" dirty="0"/>
               <a:t>Teaching Point:</a:t>
             </a:r>
             <a:r>
-              <a:rPr lang="en-US" sz="1400" kern="1200" dirty="0">
-                <a:solidFill>
-                  <a:schemeClr val="tx1"/>
-                </a:solidFill>
-                <a:effectLst/>
-                <a:latin typeface="+mn-lt"/>
-                <a:ea typeface="ＭＳ Ｐゴシック" pitchFamily="-106" charset="-128"/>
-                <a:cs typeface="ＭＳ Ｐゴシック" pitchFamily="-106" charset="-128"/>
-              </a:rPr>
+              <a:rPr lang="en-US" dirty="0"/>
               <a:t> God’s character is revealed in His unilateral commitment to Abraham  - He binds Himself to His promises with no possibility of failure.</a:t>
             </a:r>
           </a:p>
           <a:p>
             <a:pPr lvl="0"/>
-            <a:endParaRPr lang="en-US" sz="1400" dirty="0"/>
+            <a:endParaRPr lang="en-US" dirty="0"/>
           </a:p>
           <a:p>
             <a:pPr rtl="0" fontAlgn="ctr"/>
             <a:r>
-              <a:rPr lang="en-US" sz="1400" b="1" kern="1200" dirty="0">
-                <a:solidFill>
-                  <a:schemeClr val="tx1"/>
-                </a:solidFill>
-                <a:effectLst/>
-                <a:latin typeface="+mn-lt"/>
-                <a:ea typeface="ＭＳ Ｐゴシック" pitchFamily="-106" charset="-128"/>
-                <a:cs typeface="ＭＳ Ｐゴシック" pitchFamily="-106" charset="-128"/>
-              </a:rPr>
+              <a:rPr lang="en-US" b="1" dirty="0"/>
               <a:t>Overview:</a:t>
             </a:r>
             <a:r>
-              <a:rPr lang="en-US" sz="1400" kern="1200" dirty="0">
-                <a:solidFill>
-                  <a:schemeClr val="tx1"/>
-                </a:solidFill>
-                <a:effectLst/>
-                <a:latin typeface="+mn-lt"/>
-                <a:ea typeface="ＭＳ Ｐゴシック" pitchFamily="-106" charset="-128"/>
-                <a:cs typeface="ＭＳ Ｐゴシック" pitchFamily="-106" charset="-128"/>
-              </a:rPr>
+              <a:rPr lang="en-US" dirty="0"/>
               <a:t> God’s covenant with Abraham (land, descendants, blessing) sets the redemptive trajectory.</a:t>
             </a:r>
           </a:p>
           <a:p>
             <a:pPr rtl="0" fontAlgn="ctr"/>
             <a:r>
-              <a:rPr lang="en-US" sz="1400" b="1" kern="1200" dirty="0">
-                <a:solidFill>
-                  <a:schemeClr val="tx1"/>
-                </a:solidFill>
-                <a:effectLst/>
-                <a:latin typeface="+mn-lt"/>
-                <a:ea typeface="ＭＳ Ｐゴシック" pitchFamily="-106" charset="-128"/>
-                <a:cs typeface="ＭＳ Ｐゴシック" pitchFamily="-106" charset="-128"/>
-              </a:rPr>
+              <a:rPr lang="en-US" b="1" dirty="0"/>
               <a:t>Teaching Notes:</a:t>
             </a:r>
-            <a:endParaRPr lang="en-US" sz="1400" kern="1200" dirty="0">
-              <a:solidFill>
-                <a:schemeClr val="tx1"/>
-              </a:solidFill>
-              <a:effectLst/>
-              <a:latin typeface="+mn-lt"/>
-              <a:ea typeface="ＭＳ Ｐゴシック" pitchFamily="-106" charset="-128"/>
-              <a:cs typeface="ＭＳ Ｐゴシック" pitchFamily="-106" charset="-128"/>
-            </a:endParaRPr>
+            <a:endParaRPr lang="en-US" dirty="0"/>
           </a:p>
           <a:p>
             <a:pPr lvl="1" rtl="0" fontAlgn="ctr"/>
             <a:r>
-              <a:rPr lang="en-US" sz="1400" kern="1200" dirty="0">
-                <a:solidFill>
-                  <a:schemeClr val="tx1"/>
-                </a:solidFill>
-                <a:effectLst/>
-                <a:latin typeface="+mn-lt"/>
-                <a:ea typeface="ＭＳ Ｐゴシック" pitchFamily="-106" charset="-128"/>
-                <a:cs typeface="+mn-cs"/>
-              </a:rPr>
+              <a:rPr lang="en-US" dirty="0"/>
               <a:t>Genesis 12:1–3 → Call and promise.</a:t>
             </a:r>
           </a:p>
           <a:p>
             <a:pPr lvl="1" rtl="0" fontAlgn="ctr"/>
             <a:r>
-              <a:rPr lang="en-US" sz="1400" kern="1200" dirty="0">
-                <a:solidFill>
-                  <a:schemeClr val="tx1"/>
-                </a:solidFill>
-                <a:effectLst/>
-                <a:latin typeface="+mn-lt"/>
-                <a:ea typeface="ＭＳ Ｐゴシック" pitchFamily="-106" charset="-128"/>
-                <a:cs typeface="+mn-cs"/>
-              </a:rPr>
+              <a:rPr lang="en-US" dirty="0"/>
               <a:t>Genesis 15 → Covenant ratified by God alone.</a:t>
             </a:r>
           </a:p>
           <a:p>
             <a:pPr lvl="1" rtl="0" fontAlgn="ctr"/>
             <a:r>
-              <a:rPr lang="en-US" sz="1400" kern="1200" dirty="0">
-                <a:solidFill>
-                  <a:schemeClr val="tx1"/>
-                </a:solidFill>
-                <a:effectLst/>
-                <a:latin typeface="+mn-lt"/>
-                <a:ea typeface="ＭＳ Ｐゴシック" pitchFamily="-106" charset="-128"/>
-                <a:cs typeface="+mn-cs"/>
-              </a:rPr>
+              <a:rPr lang="en-US" dirty="0"/>
               <a:t>Galatians 3:7–9 → Fulfilled in Christ for all nations.</a:t>
             </a:r>
           </a:p>
           <a:p>
             <a:pPr rtl="0" fontAlgn="ctr"/>
             <a:r>
-              <a:rPr lang="en-US" sz="1400" b="1" kern="1200" dirty="0">
-                <a:solidFill>
-                  <a:schemeClr val="tx1"/>
-                </a:solidFill>
-                <a:effectLst/>
-                <a:latin typeface="+mn-lt"/>
-                <a:ea typeface="ＭＳ Ｐゴシック" pitchFamily="-106" charset="-128"/>
-                <a:cs typeface="ＭＳ Ｐゴシック" pitchFamily="-106" charset="-128"/>
-              </a:rPr>
+              <a:rPr lang="en-US" b="1" dirty="0"/>
               <a:t>Cross-References:</a:t>
             </a:r>
             <a:r>
-              <a:rPr lang="en-US" sz="1400" kern="1200" dirty="0">
-                <a:solidFill>
-                  <a:schemeClr val="tx1"/>
-                </a:solidFill>
-                <a:effectLst/>
-                <a:latin typeface="+mn-lt"/>
-                <a:ea typeface="ＭＳ Ｐゴシック" pitchFamily="-106" charset="-128"/>
-                <a:cs typeface="ＭＳ Ｐゴシック" pitchFamily="-106" charset="-128"/>
-              </a:rPr>
+              <a:rPr lang="en-US" dirty="0"/>
               <a:t> Romans 4:20–21; Hebrews 11:8–12.</a:t>
             </a:r>
           </a:p>
           <a:p>
             <a:pPr rtl="0" fontAlgn="ctr"/>
-            <a:endParaRPr lang="en-US" sz="1400" kern="1200" dirty="0">
-              <a:solidFill>
-                <a:schemeClr val="tx1"/>
-              </a:solidFill>
-              <a:effectLst/>
-              <a:latin typeface="+mn-lt"/>
-              <a:ea typeface="ＭＳ Ｐゴシック" pitchFamily="-106" charset="-128"/>
-              <a:cs typeface="ＭＳ Ｐゴシック" pitchFamily="-106" charset="-128"/>
-            </a:endParaRPr>
+            <a:endParaRPr lang="en-US" dirty="0"/>
           </a:p>
           <a:p>
             <a:pPr rtl="0" fontAlgn="ctr"/>
             <a:r>
-              <a:rPr lang="en-US" sz="1400" b="1" kern="1200" dirty="0">
-                <a:solidFill>
-                  <a:schemeClr val="tx1"/>
-                </a:solidFill>
-                <a:effectLst/>
-                <a:latin typeface="+mn-lt"/>
-                <a:ea typeface="ＭＳ Ｐゴシック" pitchFamily="-106" charset="-128"/>
-                <a:cs typeface="ＭＳ Ｐゴシック" pitchFamily="-106" charset="-128"/>
-              </a:rPr>
+              <a:rPr lang="en-US" b="1" dirty="0"/>
               <a:t>Discussion Guidance:</a:t>
             </a:r>
             <a:r>
-              <a:rPr lang="en-US" sz="1400" kern="1200" dirty="0">
-                <a:solidFill>
-                  <a:schemeClr val="tx1"/>
-                </a:solidFill>
-                <a:effectLst/>
-                <a:latin typeface="+mn-lt"/>
-                <a:ea typeface="ＭＳ Ｐゴシック" pitchFamily="-106" charset="-128"/>
-                <a:cs typeface="ＭＳ Ｐゴシック" pitchFamily="-106" charset="-128"/>
-              </a:rPr>
+              <a:rPr lang="en-US" dirty="0"/>
               <a:t> Highlight Abraham’s faith response; How did Abraham’s respond?   </a:t>
             </a:r>
           </a:p>
           <a:p>
             <a:pPr lvl="0"/>
-            <a:endParaRPr lang="en-US" sz="1400" dirty="0"/>
-          </a:p>
-          <a:p>
-            <a:pPr marL="0" marR="0" lvl="0" indent="0" algn="l" defTabSz="914400" rtl="0" eaLnBrk="0" fontAlgn="base" latinLnBrk="0" hangingPunct="0">
-              <a:lnSpc>
-                <a:spcPct val="100000"/>
-              </a:lnSpc>
-              <a:spcBef>
-                <a:spcPct val="30000"/>
-              </a:spcBef>
-              <a:spcAft>
-                <a:spcPct val="0"/>
-              </a:spcAft>
-              <a:buClrTx/>
-              <a:buSzTx/>
-              <a:buFontTx/>
-              <a:buNone/>
-              <a:tabLst/>
+            <a:endParaRPr lang="en-US" dirty="0"/>
+          </a:p>
+          <a:p>
+            <a:pPr defTabSz="766724">
               <a:defRPr/>
             </a:pPr>
             <a:r>
-              <a:rPr lang="en-US" sz="1400" b="1" dirty="0"/>
-              <a:t>READ</a:t>
-            </a:r>
-            <a:r>
-              <a:rPr lang="en-US" sz="1400" b="1" kern="1200" dirty="0">
-                <a:solidFill>
-                  <a:schemeClr val="tx1"/>
-                </a:solidFill>
-                <a:effectLst/>
-                <a:latin typeface="+mn-lt"/>
-                <a:ea typeface="ＭＳ Ｐゴシック" pitchFamily="-106" charset="-128"/>
-                <a:cs typeface="ＭＳ Ｐゴシック" pitchFamily="-106" charset="-128"/>
-              </a:rPr>
-              <a:t>:  Romans 4:20–21; Hebrews 11:8–12.</a:t>
+              <a:rPr lang="en-US" b="1" dirty="0"/>
+              <a:t>READ:  Romans 4:20–21; Hebrews 11:8–12.</a:t>
             </a:r>
           </a:p>
           <a:p>
             <a:pPr lvl="0"/>
-            <a:endParaRPr lang="en-US" sz="1400" dirty="0"/>
+            <a:endParaRPr lang="en-US" dirty="0"/>
           </a:p>
         </p:txBody>
       </p:sp>
@@ -3055,360 +2101,144 @@
           <a:lstStyle/>
           <a:p>
             <a:r>
-              <a:rPr lang="en-US" sz="1400" b="1" kern="1200" dirty="0">
-                <a:solidFill>
-                  <a:schemeClr val="tx1"/>
-                </a:solidFill>
-                <a:effectLst/>
-                <a:latin typeface="+mn-lt"/>
-                <a:ea typeface="ＭＳ Ｐゴシック" pitchFamily="-106" charset="-128"/>
-                <a:cs typeface="ＭＳ Ｐゴシック" pitchFamily="-106" charset="-128"/>
-              </a:rPr>
+              <a:rPr lang="en-US" b="1" dirty="0"/>
               <a:t>God’s Character Revealed in Christ (Abraham’s Seed)</a:t>
             </a:r>
           </a:p>
           <a:p>
-            <a:endParaRPr lang="en-US" sz="1400" kern="1200" dirty="0">
-              <a:solidFill>
-                <a:schemeClr val="tx1"/>
-              </a:solidFill>
-              <a:effectLst/>
-              <a:latin typeface="+mn-lt"/>
-              <a:ea typeface="ＭＳ Ｐゴシック" pitchFamily="-106" charset="-128"/>
-              <a:cs typeface="ＭＳ Ｐゴシック" pitchFamily="-106" charset="-128"/>
-            </a:endParaRPr>
+            <a:endParaRPr lang="en-US" dirty="0"/>
           </a:p>
           <a:p>
             <a:pPr rtl="0" fontAlgn="ctr"/>
             <a:r>
-              <a:rPr lang="en-US" sz="1400" b="1" kern="1200" dirty="0">
-                <a:solidFill>
-                  <a:schemeClr val="tx1"/>
-                </a:solidFill>
-                <a:effectLst/>
-                <a:latin typeface="+mn-lt"/>
-                <a:ea typeface="ＭＳ Ｐゴシック" pitchFamily="-106" charset="-128"/>
-                <a:cs typeface="ＭＳ Ｐゴシック" pitchFamily="-106" charset="-128"/>
-              </a:rPr>
+              <a:rPr lang="en-US" b="1" dirty="0"/>
               <a:t>Jesus, the Fulfillment of the Promise</a:t>
             </a:r>
-            <a:endParaRPr lang="en-US" sz="1400" kern="1200" dirty="0">
-              <a:solidFill>
-                <a:schemeClr val="tx1"/>
-              </a:solidFill>
-              <a:effectLst/>
-              <a:latin typeface="+mn-lt"/>
-              <a:ea typeface="ＭＳ Ｐゴシック" pitchFamily="-106" charset="-128"/>
-              <a:cs typeface="ＭＳ Ｐゴシック" pitchFamily="-106" charset="-128"/>
-            </a:endParaRPr>
+            <a:endParaRPr lang="en-US" dirty="0"/>
           </a:p>
           <a:p>
             <a:pPr lvl="1" rtl="0" fontAlgn="ctr"/>
             <a:r>
-              <a:rPr lang="en-US" sz="1400" i="1" kern="1200" dirty="0">
-                <a:solidFill>
-                  <a:schemeClr val="tx1"/>
-                </a:solidFill>
-                <a:effectLst/>
-                <a:latin typeface="+mn-lt"/>
-                <a:ea typeface="ＭＳ Ｐゴシック" pitchFamily="-106" charset="-128"/>
-                <a:cs typeface="+mn-cs"/>
-              </a:rPr>
+              <a:rPr lang="en-US" i="1" dirty="0"/>
               <a:t>Galatians 3:16</a:t>
             </a:r>
             <a:r>
-              <a:rPr lang="en-US" sz="1400" kern="1200" dirty="0">
-                <a:solidFill>
-                  <a:schemeClr val="tx1"/>
-                </a:solidFill>
-                <a:effectLst/>
-                <a:latin typeface="+mn-lt"/>
-                <a:ea typeface="ＭＳ Ｐゴシック" pitchFamily="-106" charset="-128"/>
-                <a:cs typeface="+mn-cs"/>
-              </a:rPr>
+              <a:rPr lang="en-US" dirty="0"/>
               <a:t>  The promises were ultimately to Abraham’s “seed,” Christ.</a:t>
             </a:r>
           </a:p>
           <a:p>
             <a:pPr lvl="1" rtl="0" fontAlgn="ctr"/>
             <a:r>
-              <a:rPr lang="en-US" sz="1400" i="1" kern="1200" dirty="0">
-                <a:solidFill>
-                  <a:schemeClr val="tx1"/>
-                </a:solidFill>
-                <a:effectLst/>
-                <a:latin typeface="+mn-lt"/>
-                <a:ea typeface="ＭＳ Ｐゴシック" pitchFamily="-106" charset="-128"/>
-                <a:cs typeface="+mn-cs"/>
-              </a:rPr>
+              <a:rPr lang="en-US" i="1" dirty="0"/>
               <a:t>Luke 3:34</a:t>
             </a:r>
             <a:r>
-              <a:rPr lang="en-US" sz="1400" kern="1200" dirty="0">
-                <a:solidFill>
-                  <a:schemeClr val="tx1"/>
-                </a:solidFill>
-                <a:effectLst/>
-                <a:latin typeface="+mn-lt"/>
-                <a:ea typeface="ＭＳ Ｐゴシック" pitchFamily="-106" charset="-128"/>
-                <a:cs typeface="+mn-cs"/>
-              </a:rPr>
+              <a:rPr lang="en-US" dirty="0"/>
               <a:t>   Jesus is in Abraham’s line, the heir of the covenant.</a:t>
             </a:r>
           </a:p>
           <a:p>
             <a:pPr rtl="0" fontAlgn="ctr"/>
             <a:r>
-              <a:rPr lang="en-US" sz="1400" b="1" kern="1200" dirty="0">
-                <a:solidFill>
-                  <a:schemeClr val="tx1"/>
-                </a:solidFill>
-                <a:effectLst/>
-                <a:latin typeface="+mn-lt"/>
-                <a:ea typeface="ＭＳ Ｐゴシック" pitchFamily="-106" charset="-128"/>
-                <a:cs typeface="ＭＳ Ｐゴシック" pitchFamily="-106" charset="-128"/>
-              </a:rPr>
+              <a:rPr lang="en-US" b="1" dirty="0"/>
               <a:t>Blessing to the Nations</a:t>
             </a:r>
-            <a:endParaRPr lang="en-US" sz="1400" kern="1200" dirty="0">
-              <a:solidFill>
-                <a:schemeClr val="tx1"/>
-              </a:solidFill>
-              <a:effectLst/>
-              <a:latin typeface="+mn-lt"/>
-              <a:ea typeface="ＭＳ Ｐゴシック" pitchFamily="-106" charset="-128"/>
-              <a:cs typeface="ＭＳ Ｐゴシック" pitchFamily="-106" charset="-128"/>
-            </a:endParaRPr>
+            <a:endParaRPr lang="en-US" dirty="0"/>
           </a:p>
           <a:p>
             <a:pPr lvl="1" rtl="0" fontAlgn="ctr"/>
             <a:r>
-              <a:rPr lang="en-US" sz="1400" i="1" kern="1200" dirty="0">
-                <a:solidFill>
-                  <a:schemeClr val="tx1"/>
-                </a:solidFill>
-                <a:effectLst/>
-                <a:latin typeface="+mn-lt"/>
-                <a:ea typeface="ＭＳ Ｐゴシック" pitchFamily="-106" charset="-128"/>
-                <a:cs typeface="+mn-cs"/>
-              </a:rPr>
+              <a:rPr lang="en-US" i="1" dirty="0"/>
               <a:t>Galatians 3:8</a:t>
             </a:r>
             <a:r>
-              <a:rPr lang="en-US" sz="1400" kern="1200" dirty="0">
-                <a:solidFill>
-                  <a:schemeClr val="tx1"/>
-                </a:solidFill>
-                <a:effectLst/>
-                <a:latin typeface="+mn-lt"/>
-                <a:ea typeface="ＭＳ Ｐゴシック" pitchFamily="-106" charset="-128"/>
-                <a:cs typeface="+mn-cs"/>
-              </a:rPr>
+              <a:rPr lang="en-US" dirty="0"/>
               <a:t>   The gospel was announced beforehand to Abraham: all nations blessed in Christ.</a:t>
             </a:r>
           </a:p>
           <a:p>
             <a:pPr lvl="1" rtl="0" fontAlgn="ctr"/>
             <a:r>
-              <a:rPr lang="en-US" sz="1400" i="1" kern="1200" dirty="0">
-                <a:solidFill>
-                  <a:schemeClr val="tx1"/>
-                </a:solidFill>
-                <a:effectLst/>
-                <a:latin typeface="+mn-lt"/>
-                <a:ea typeface="ＭＳ Ｐゴシック" pitchFamily="-106" charset="-128"/>
-                <a:cs typeface="+mn-cs"/>
-              </a:rPr>
+              <a:rPr lang="en-US" i="1" dirty="0"/>
               <a:t>Matthew 28:19</a:t>
             </a:r>
             <a:r>
-              <a:rPr lang="en-US" sz="1400" kern="1200" dirty="0">
-                <a:solidFill>
-                  <a:schemeClr val="tx1"/>
-                </a:solidFill>
-                <a:effectLst/>
-                <a:latin typeface="+mn-lt"/>
-                <a:ea typeface="ＭＳ Ｐゴシック" pitchFamily="-106" charset="-128"/>
-                <a:cs typeface="+mn-cs"/>
-              </a:rPr>
+              <a:rPr lang="en-US" dirty="0"/>
               <a:t>   Fulfillment in the Great Commission to the nations.</a:t>
             </a:r>
           </a:p>
           <a:p>
             <a:pPr rtl="0" fontAlgn="ctr"/>
             <a:r>
-              <a:rPr lang="en-US" sz="1400" b="1" kern="1200" dirty="0">
-                <a:solidFill>
-                  <a:schemeClr val="tx1"/>
-                </a:solidFill>
-                <a:effectLst/>
-                <a:latin typeface="+mn-lt"/>
-                <a:ea typeface="ＭＳ Ｐゴシック" pitchFamily="-106" charset="-128"/>
-                <a:cs typeface="ＭＳ Ｐゴシック" pitchFamily="-106" charset="-128"/>
-              </a:rPr>
+              <a:rPr lang="en-US" b="1" dirty="0"/>
               <a:t>Faith as the Response</a:t>
             </a:r>
-            <a:endParaRPr lang="en-US" sz="1400" kern="1200" dirty="0">
-              <a:solidFill>
-                <a:schemeClr val="tx1"/>
-              </a:solidFill>
-              <a:effectLst/>
-              <a:latin typeface="+mn-lt"/>
-              <a:ea typeface="ＭＳ Ｐゴシック" pitchFamily="-106" charset="-128"/>
-              <a:cs typeface="ＭＳ Ｐゴシック" pitchFamily="-106" charset="-128"/>
-            </a:endParaRPr>
+            <a:endParaRPr lang="en-US" dirty="0"/>
           </a:p>
           <a:p>
             <a:pPr lvl="1" rtl="0" fontAlgn="ctr"/>
             <a:r>
-              <a:rPr lang="en-US" sz="1400" i="1" kern="1200" dirty="0">
-                <a:solidFill>
-                  <a:schemeClr val="tx1"/>
-                </a:solidFill>
-                <a:effectLst/>
-                <a:latin typeface="+mn-lt"/>
-                <a:ea typeface="ＭＳ Ｐゴシック" pitchFamily="-106" charset="-128"/>
-                <a:cs typeface="+mn-cs"/>
-              </a:rPr>
+              <a:rPr lang="en-US" i="1" dirty="0"/>
               <a:t>Romans 4:20–21</a:t>
             </a:r>
             <a:r>
-              <a:rPr lang="en-US" sz="1400" kern="1200" dirty="0">
-                <a:solidFill>
-                  <a:schemeClr val="tx1"/>
-                </a:solidFill>
-                <a:effectLst/>
-                <a:latin typeface="+mn-lt"/>
-                <a:ea typeface="ＭＳ Ｐゴシック" pitchFamily="-106" charset="-128"/>
-                <a:cs typeface="+mn-cs"/>
-              </a:rPr>
+              <a:rPr lang="en-US" dirty="0"/>
               <a:t>   Abraham’s faith in God’s promise models how we trust in Christ.</a:t>
             </a:r>
           </a:p>
           <a:p>
             <a:pPr lvl="1" rtl="0" fontAlgn="ctr"/>
-            <a:endParaRPr lang="en-US" sz="1400" kern="1200" dirty="0">
-              <a:solidFill>
-                <a:schemeClr val="tx1"/>
-              </a:solidFill>
-              <a:effectLst/>
-              <a:latin typeface="+mn-lt"/>
-              <a:ea typeface="ＭＳ Ｐゴシック" pitchFamily="-106" charset="-128"/>
-              <a:cs typeface="+mn-cs"/>
-            </a:endParaRPr>
-          </a:p>
-          <a:p>
-            <a:r>
-              <a:rPr lang="en-US" sz="1400" b="1" kern="1200" dirty="0">
-                <a:solidFill>
-                  <a:schemeClr val="tx1"/>
-                </a:solidFill>
-                <a:effectLst/>
-                <a:latin typeface="+mn-lt"/>
-                <a:ea typeface="ＭＳ Ｐゴシック" pitchFamily="-106" charset="-128"/>
-                <a:cs typeface="ＭＳ Ｐゴシック" pitchFamily="-106" charset="-128"/>
-              </a:rPr>
+            <a:endParaRPr lang="en-US" dirty="0"/>
+          </a:p>
+          <a:p>
+            <a:r>
+              <a:rPr lang="en-US" b="1" dirty="0"/>
               <a:t>Teaching Point:</a:t>
             </a:r>
             <a:r>
-              <a:rPr lang="en-US" sz="1400" kern="1200" dirty="0">
-                <a:solidFill>
-                  <a:schemeClr val="tx1"/>
-                </a:solidFill>
-                <a:effectLst/>
-                <a:latin typeface="+mn-lt"/>
-                <a:ea typeface="ＭＳ Ｐゴシック" pitchFamily="-106" charset="-128"/>
-                <a:cs typeface="ＭＳ Ｐゴシック" pitchFamily="-106" charset="-128"/>
-              </a:rPr>
+              <a:rPr lang="en-US" dirty="0"/>
               <a:t> The covenant blessing reaches its climax in Jesus Christ, who brings salvation to every nation.</a:t>
             </a:r>
           </a:p>
           <a:p>
-            <a:endParaRPr lang="en-US" sz="1400" dirty="0"/>
-          </a:p>
-          <a:p>
-            <a:endParaRPr lang="en-US" sz="1400" dirty="0"/>
-          </a:p>
-          <a:p>
-            <a:r>
-              <a:rPr lang="en-US" sz="1400" b="1" kern="1200" dirty="0">
-                <a:solidFill>
-                  <a:schemeClr val="tx1"/>
-                </a:solidFill>
-                <a:effectLst/>
-                <a:latin typeface="+mn-lt"/>
-                <a:ea typeface="ＭＳ Ｐゴシック" pitchFamily="-106" charset="-128"/>
-                <a:cs typeface="ＭＳ Ｐゴシック" pitchFamily="-106" charset="-128"/>
-              </a:rPr>
+            <a:endParaRPr lang="en-US" dirty="0"/>
+          </a:p>
+          <a:p>
+            <a:endParaRPr lang="en-US" dirty="0"/>
+          </a:p>
+          <a:p>
+            <a:r>
+              <a:rPr lang="en-US" b="1" dirty="0"/>
               <a:t>Discussion Questions</a:t>
             </a:r>
-            <a:endParaRPr lang="en-US" sz="1400" kern="1200" dirty="0">
-              <a:solidFill>
-                <a:schemeClr val="tx1"/>
-              </a:solidFill>
-              <a:effectLst/>
-              <a:latin typeface="+mn-lt"/>
-              <a:ea typeface="ＭＳ Ｐゴシック" pitchFamily="-106" charset="-128"/>
-              <a:cs typeface="ＭＳ Ｐゴシック" pitchFamily="-106" charset="-128"/>
-            </a:endParaRPr>
+            <a:endParaRPr lang="en-US" dirty="0"/>
           </a:p>
           <a:p>
             <a:pPr rtl="0" fontAlgn="ctr"/>
             <a:r>
-              <a:rPr lang="en-US" sz="1400" b="0" i="0" kern="1200" dirty="0">
-                <a:solidFill>
-                  <a:schemeClr val="tx1"/>
-                </a:solidFill>
-                <a:effectLst/>
-                <a:latin typeface="+mn-lt"/>
-                <a:ea typeface="ＭＳ Ｐゴシック" pitchFamily="-106" charset="-128"/>
-                <a:cs typeface="ＭＳ Ｐゴシック" pitchFamily="-106" charset="-128"/>
-              </a:rPr>
+              <a:rPr lang="en-US" dirty="0"/>
               <a:t>Why did God’s promise to Abraham matter so much in the biblical storyline?</a:t>
             </a:r>
           </a:p>
           <a:p>
             <a:pPr rtl="0" fontAlgn="ctr"/>
             <a:r>
-              <a:rPr lang="en-US" sz="1400" b="1" i="0" kern="1200" dirty="0">
-                <a:solidFill>
-                  <a:schemeClr val="tx1"/>
-                </a:solidFill>
-                <a:effectLst/>
-                <a:latin typeface="+mn-lt"/>
-                <a:ea typeface="ＭＳ Ｐゴシック" pitchFamily="-106" charset="-128"/>
-                <a:cs typeface="ＭＳ Ｐゴシック" pitchFamily="-106" charset="-128"/>
-              </a:rPr>
+              <a:rPr lang="en-US" b="1" dirty="0"/>
               <a:t>How does Abraham’s faith model the way we are to trust God today?</a:t>
             </a:r>
           </a:p>
           <a:p>
             <a:pPr rtl="0" fontAlgn="ctr"/>
             <a:r>
-              <a:rPr lang="en-US" sz="1400" b="0" i="0" kern="1200" dirty="0">
-                <a:solidFill>
-                  <a:schemeClr val="tx1"/>
-                </a:solidFill>
-                <a:effectLst/>
-                <a:latin typeface="+mn-lt"/>
-                <a:ea typeface="ＭＳ Ｐゴシック" pitchFamily="-106" charset="-128"/>
-                <a:cs typeface="ＭＳ Ｐゴシック" pitchFamily="-106" charset="-128"/>
-              </a:rPr>
+              <a:rPr lang="en-US" dirty="0"/>
               <a:t>In what ways are you personally living as an heir of Abraham’s promise?</a:t>
             </a:r>
           </a:p>
           <a:p>
             <a:pPr rtl="0" fontAlgn="ctr"/>
             <a:r>
-              <a:rPr lang="en-US" sz="1400" b="0" i="0" kern="1200" dirty="0">
-                <a:solidFill>
-                  <a:schemeClr val="tx1"/>
-                </a:solidFill>
-                <a:effectLst/>
-                <a:latin typeface="+mn-lt"/>
-                <a:ea typeface="ＭＳ Ｐゴシック" pitchFamily="-106" charset="-128"/>
-                <a:cs typeface="ＭＳ Ｐゴシック" pitchFamily="-106" charset="-128"/>
-              </a:rPr>
+              <a:rPr lang="en-US" dirty="0"/>
               <a:t>How does this covenant shape our mission to bless the nations?</a:t>
             </a:r>
           </a:p>
@@ -3530,56 +2360,24 @@
           <a:lstStyle/>
           <a:p>
             <a:r>
-              <a:rPr lang="en-US" sz="1400" kern="1200" dirty="0">
-                <a:solidFill>
-                  <a:schemeClr val="tx1"/>
-                </a:solidFill>
-                <a:effectLst/>
-                <a:latin typeface="+mn-lt"/>
-                <a:ea typeface="ＭＳ Ｐゴシック" pitchFamily="-106" charset="-128"/>
-                <a:cs typeface="ＭＳ Ｐゴシック" pitchFamily="-106" charset="-128"/>
-              </a:rPr>
+              <a:rPr lang="en-US" dirty="0"/>
               <a:t>These passages explicitly </a:t>
             </a:r>
             <a:r>
-              <a:rPr lang="en-US" sz="1400" b="1" kern="1200" dirty="0">
-                <a:solidFill>
-                  <a:schemeClr val="tx1"/>
-                </a:solidFill>
-                <a:effectLst/>
-                <a:latin typeface="+mn-lt"/>
-                <a:ea typeface="ＭＳ Ｐゴシック" pitchFamily="-106" charset="-128"/>
-                <a:cs typeface="ＭＳ Ｐゴシック" pitchFamily="-106" charset="-128"/>
-              </a:rPr>
+              <a:rPr lang="en-US" b="1" dirty="0"/>
               <a:t>quote or allude</a:t>
             </a:r>
             <a:r>
-              <a:rPr lang="en-US" sz="1400" kern="1200" dirty="0">
-                <a:solidFill>
-                  <a:schemeClr val="tx1"/>
-                </a:solidFill>
-                <a:effectLst/>
-                <a:latin typeface="+mn-lt"/>
-                <a:ea typeface="ＭＳ Ｐゴシック" pitchFamily="-106" charset="-128"/>
-                <a:cs typeface="ＭＳ Ｐゴシック" pitchFamily="-106" charset="-128"/>
-              </a:rPr>
+              <a:rPr lang="en-US" dirty="0"/>
               <a:t> to God’s words in Genesis 12:1-3, 15:5-6, or 17:7.</a:t>
             </a:r>
           </a:p>
           <a:p>
-            <a:endParaRPr lang="en-US" sz="1400" kern="1200" dirty="0">
-              <a:solidFill>
-                <a:schemeClr val="tx1"/>
-              </a:solidFill>
-              <a:effectLst/>
-              <a:latin typeface="+mn-lt"/>
-              <a:ea typeface="ＭＳ Ｐゴシック" pitchFamily="-106" charset="-128"/>
-              <a:cs typeface="ＭＳ Ｐゴシック" pitchFamily="-106" charset="-128"/>
-            </a:endParaRPr>
-          </a:p>
-          <a:p>
-            <a:pPr defTabSz="938266"/>
-            <a:endParaRPr lang="en-US" sz="1400" dirty="0"/>
+            <a:endParaRPr lang="en-US" dirty="0"/>
+          </a:p>
+          <a:p>
+            <a:pPr defTabSz="786736"/>
+            <a:endParaRPr lang="en-US" dirty="0"/>
           </a:p>
           <a:p>
             <a:endParaRPr lang="en-US" dirty="0"/>
@@ -3699,65 +2497,25 @@
           <a:lstStyle/>
           <a:p>
             <a:r>
-              <a:rPr lang="en-US" sz="1400" b="1" kern="1200" dirty="0">
-                <a:solidFill>
-                  <a:schemeClr val="tx1"/>
-                </a:solidFill>
-                <a:effectLst/>
-                <a:latin typeface="+mn-lt"/>
-                <a:ea typeface="ＭＳ Ｐゴシック" pitchFamily="-106" charset="-128"/>
-                <a:cs typeface="ＭＳ Ｐゴシック" pitchFamily="-106" charset="-128"/>
-              </a:rPr>
+              <a:rPr lang="en-US" b="1" dirty="0"/>
               <a:t>The Promise Interpreted Theologically</a:t>
             </a:r>
           </a:p>
           <a:p>
-            <a:endParaRPr lang="en-US" sz="1400" kern="1200" dirty="0">
-              <a:solidFill>
-                <a:schemeClr val="tx1"/>
-              </a:solidFill>
-              <a:effectLst/>
-              <a:latin typeface="+mn-lt"/>
-              <a:ea typeface="ＭＳ Ｐゴシック" pitchFamily="-106" charset="-128"/>
-              <a:cs typeface="ＭＳ Ｐゴシック" pitchFamily="-106" charset="-128"/>
-            </a:endParaRPr>
-          </a:p>
-          <a:p>
-            <a:r>
-              <a:rPr lang="en-US" sz="1400" kern="1200" dirty="0">
-                <a:solidFill>
-                  <a:schemeClr val="tx1"/>
-                </a:solidFill>
-                <a:effectLst/>
-                <a:latin typeface="+mn-lt"/>
-                <a:ea typeface="ＭＳ Ｐゴシック" pitchFamily="-106" charset="-128"/>
-                <a:cs typeface="ＭＳ Ｐゴシック" pitchFamily="-106" charset="-128"/>
-              </a:rPr>
+            <a:endParaRPr lang="en-US" dirty="0"/>
+          </a:p>
+          <a:p>
+            <a:r>
+              <a:rPr lang="en-US" dirty="0"/>
               <a:t>These passages </a:t>
             </a:r>
             <a:r>
-              <a:rPr lang="en-US" sz="1400" b="1" kern="1200" dirty="0">
-                <a:solidFill>
-                  <a:schemeClr val="tx1"/>
-                </a:solidFill>
-                <a:effectLst/>
-                <a:latin typeface="+mn-lt"/>
-                <a:ea typeface="ＭＳ Ｐゴシック" pitchFamily="-106" charset="-128"/>
-                <a:cs typeface="ＭＳ Ｐゴシック" pitchFamily="-106" charset="-128"/>
-              </a:rPr>
+              <a:rPr lang="en-US" b="1" dirty="0"/>
               <a:t>explain the covenant’s fulfillment in Christ and believers.</a:t>
             </a:r>
           </a:p>
           <a:p>
-            <a:endParaRPr lang="en-US" sz="1400" kern="1200" dirty="0">
-              <a:solidFill>
-                <a:schemeClr val="tx1"/>
-              </a:solidFill>
-              <a:effectLst/>
-              <a:latin typeface="+mn-lt"/>
-              <a:ea typeface="ＭＳ Ｐゴシック" pitchFamily="-106" charset="-128"/>
-              <a:cs typeface="ＭＳ Ｐゴシック" pitchFamily="-106" charset="-128"/>
-            </a:endParaRPr>
+            <a:endParaRPr lang="en-US" dirty="0"/>
           </a:p>
           <a:p>
             <a:endParaRPr lang="en-US" dirty="0"/>
@@ -3877,261 +2635,101 @@
           <a:lstStyle/>
           <a:p>
             <a:r>
-              <a:rPr lang="en-US" sz="1400" b="1" kern="1200" dirty="0">
-                <a:solidFill>
-                  <a:schemeClr val="tx1"/>
-                </a:solidFill>
-                <a:effectLst/>
-                <a:latin typeface="+mn-lt"/>
-                <a:ea typeface="ＭＳ Ｐゴシック" pitchFamily="-106" charset="-128"/>
-                <a:cs typeface="ＭＳ Ｐゴシック" pitchFamily="-106" charset="-128"/>
-              </a:rPr>
+              <a:rPr lang="en-US" b="1" dirty="0"/>
               <a:t>The Promise Extended to the Nations</a:t>
             </a:r>
-            <a:endParaRPr lang="en-US" sz="1400" kern="1200" dirty="0">
-              <a:solidFill>
-                <a:schemeClr val="tx1"/>
-              </a:solidFill>
-              <a:effectLst/>
-              <a:latin typeface="+mn-lt"/>
-              <a:ea typeface="ＭＳ Ｐゴシック" pitchFamily="-106" charset="-128"/>
-              <a:cs typeface="ＭＳ Ｐゴシック" pitchFamily="-106" charset="-128"/>
-            </a:endParaRPr>
-          </a:p>
-          <a:p>
-            <a:endParaRPr lang="en-US" sz="1400" kern="1200" dirty="0">
-              <a:solidFill>
-                <a:schemeClr val="tx1"/>
-              </a:solidFill>
-              <a:effectLst/>
-              <a:latin typeface="+mn-lt"/>
-              <a:ea typeface="ＭＳ Ｐゴシック" pitchFamily="-106" charset="-128"/>
-              <a:cs typeface="ＭＳ Ｐゴシック" pitchFamily="-106" charset="-128"/>
-            </a:endParaRPr>
-          </a:p>
-          <a:p>
-            <a:r>
-              <a:rPr lang="en-US" sz="1400" kern="1200" dirty="0">
-                <a:solidFill>
-                  <a:schemeClr val="tx1"/>
-                </a:solidFill>
-                <a:effectLst/>
-                <a:latin typeface="+mn-lt"/>
-                <a:ea typeface="ＭＳ Ｐゴシック" pitchFamily="-106" charset="-128"/>
-                <a:cs typeface="ＭＳ Ｐゴシック" pitchFamily="-106" charset="-128"/>
-              </a:rPr>
+            <a:endParaRPr lang="en-US" dirty="0"/>
+          </a:p>
+          <a:p>
+            <a:endParaRPr lang="en-US" dirty="0"/>
+          </a:p>
+          <a:p>
+            <a:r>
+              <a:rPr lang="en-US" dirty="0"/>
               <a:t>These passages </a:t>
             </a:r>
             <a:r>
-              <a:rPr lang="en-US" sz="1400" b="1" kern="1200" dirty="0">
-                <a:solidFill>
-                  <a:schemeClr val="tx1"/>
-                </a:solidFill>
-                <a:effectLst/>
-                <a:latin typeface="+mn-lt"/>
-                <a:ea typeface="ＭＳ Ｐゴシック" pitchFamily="-106" charset="-128"/>
-                <a:cs typeface="ＭＳ Ｐゴシック" pitchFamily="-106" charset="-128"/>
-              </a:rPr>
+              <a:rPr lang="en-US" b="1" dirty="0"/>
               <a:t>apply Abraham’s blessing to the global mission of the church.</a:t>
             </a:r>
           </a:p>
           <a:p>
-            <a:endParaRPr lang="en-US" sz="1400" kern="1200" dirty="0">
-              <a:solidFill>
-                <a:schemeClr val="tx1"/>
-              </a:solidFill>
-              <a:effectLst/>
-              <a:latin typeface="+mn-lt"/>
-              <a:ea typeface="ＭＳ Ｐゴシック" pitchFamily="-106" charset="-128"/>
-              <a:cs typeface="ＭＳ Ｐゴシック" pitchFamily="-106" charset="-128"/>
-            </a:endParaRPr>
+            <a:endParaRPr lang="en-US" dirty="0"/>
           </a:p>
           <a:p>
             <a:pPr rtl="0" fontAlgn="ctr"/>
             <a:r>
-              <a:rPr lang="en-US" sz="1400" b="1" kern="1200" dirty="0">
-                <a:solidFill>
-                  <a:schemeClr val="tx1"/>
-                </a:solidFill>
-                <a:effectLst/>
-                <a:latin typeface="+mn-lt"/>
-                <a:ea typeface="ＭＳ Ｐゴシック" pitchFamily="-106" charset="-128"/>
-                <a:cs typeface="ＭＳ Ｐゴシック" pitchFamily="-106" charset="-128"/>
-              </a:rPr>
+              <a:rPr lang="en-US" b="1" dirty="0"/>
               <a:t>Matthew 8:11–12</a:t>
             </a:r>
             <a:r>
-              <a:rPr lang="en-US" sz="1400" kern="1200" dirty="0">
-                <a:solidFill>
-                  <a:schemeClr val="tx1"/>
-                </a:solidFill>
-                <a:effectLst/>
-                <a:latin typeface="+mn-lt"/>
-                <a:ea typeface="ＭＳ Ｐゴシック" pitchFamily="-106" charset="-128"/>
-                <a:cs typeface="ＭＳ Ｐゴシック" pitchFamily="-106" charset="-128"/>
-              </a:rPr>
+              <a:rPr lang="en-US" dirty="0"/>
               <a:t>  Jesus says many from east and west will recline with Abraham in the kingdom.</a:t>
             </a:r>
           </a:p>
           <a:p>
             <a:pPr rtl="0" fontAlgn="ctr"/>
             <a:r>
-              <a:rPr lang="en-US" sz="1400" b="1" kern="1200" dirty="0">
-                <a:solidFill>
-                  <a:schemeClr val="tx1"/>
-                </a:solidFill>
-                <a:effectLst/>
-                <a:latin typeface="+mn-lt"/>
-                <a:ea typeface="ＭＳ Ｐゴシック" pitchFamily="-106" charset="-128"/>
-                <a:cs typeface="ＭＳ Ｐゴシック" pitchFamily="-106" charset="-128"/>
-              </a:rPr>
+              <a:rPr lang="en-US" b="1" dirty="0"/>
               <a:t>Luke 13:28–29</a:t>
             </a:r>
             <a:r>
-              <a:rPr lang="en-US" sz="1400" kern="1200" dirty="0">
-                <a:solidFill>
-                  <a:schemeClr val="tx1"/>
-                </a:solidFill>
-                <a:effectLst/>
-                <a:latin typeface="+mn-lt"/>
-                <a:ea typeface="ＭＳ Ｐゴシック" pitchFamily="-106" charset="-128"/>
-                <a:cs typeface="ＭＳ Ｐゴシック" pitchFamily="-106" charset="-128"/>
-              </a:rPr>
+              <a:rPr lang="en-US" dirty="0"/>
               <a:t>  Echoes the same image of Gentiles included with the patriarchs.</a:t>
             </a:r>
           </a:p>
           <a:p>
             <a:pPr rtl="0" fontAlgn="ctr"/>
             <a:r>
-              <a:rPr lang="en-US" sz="1400" b="1" kern="1200" dirty="0">
-                <a:solidFill>
-                  <a:schemeClr val="tx1"/>
-                </a:solidFill>
-                <a:effectLst/>
-                <a:latin typeface="+mn-lt"/>
-                <a:ea typeface="ＭＳ Ｐゴシック" pitchFamily="-106" charset="-128"/>
-                <a:cs typeface="ＭＳ Ｐゴシック" pitchFamily="-106" charset="-128"/>
-              </a:rPr>
+              <a:rPr lang="en-US" b="1" dirty="0"/>
               <a:t>Acts 13:32–33</a:t>
             </a:r>
             <a:r>
-              <a:rPr lang="en-US" sz="1400" kern="1200" dirty="0">
-                <a:solidFill>
-                  <a:schemeClr val="tx1"/>
-                </a:solidFill>
-                <a:effectLst/>
-                <a:latin typeface="+mn-lt"/>
-                <a:ea typeface="ＭＳ Ｐゴシック" pitchFamily="-106" charset="-128"/>
-                <a:cs typeface="ＭＳ Ｐゴシック" pitchFamily="-106" charset="-128"/>
-              </a:rPr>
+              <a:rPr lang="en-US" dirty="0"/>
               <a:t>  Paul calls the resurrection “the good news that God promised to the fathers.”</a:t>
             </a:r>
           </a:p>
           <a:p>
             <a:pPr rtl="0" fontAlgn="ctr"/>
             <a:r>
-              <a:rPr lang="en-US" sz="1400" b="1" kern="1200" dirty="0">
-                <a:solidFill>
-                  <a:schemeClr val="tx1"/>
-                </a:solidFill>
-                <a:effectLst/>
-                <a:latin typeface="+mn-lt"/>
-                <a:ea typeface="ＭＳ Ｐゴシック" pitchFamily="-106" charset="-128"/>
-                <a:cs typeface="ＭＳ Ｐゴシック" pitchFamily="-106" charset="-128"/>
-              </a:rPr>
+              <a:rPr lang="en-US" b="1" dirty="0"/>
               <a:t>Romans 15:8–12</a:t>
             </a:r>
             <a:r>
-              <a:rPr lang="en-US" sz="1400" kern="1200" dirty="0">
-                <a:solidFill>
-                  <a:schemeClr val="tx1"/>
-                </a:solidFill>
-                <a:effectLst/>
-                <a:latin typeface="+mn-lt"/>
-                <a:ea typeface="ＭＳ Ｐゴシック" pitchFamily="-106" charset="-128"/>
-                <a:cs typeface="ＭＳ Ｐゴシック" pitchFamily="-106" charset="-128"/>
-              </a:rPr>
+              <a:rPr lang="en-US" dirty="0"/>
               <a:t>  Paul teaches that Christ confirmed the promises to the patriarchs so the Gentiles might glorify God.</a:t>
             </a:r>
           </a:p>
           <a:p>
             <a:pPr rtl="0" fontAlgn="ctr"/>
             <a:r>
-              <a:rPr lang="en-US" sz="1400" b="1" kern="1200" dirty="0">
-                <a:solidFill>
-                  <a:schemeClr val="tx1"/>
-                </a:solidFill>
-                <a:effectLst/>
-                <a:latin typeface="+mn-lt"/>
-                <a:ea typeface="ＭＳ Ｐゴシック" pitchFamily="-106" charset="-128"/>
-                <a:cs typeface="ＭＳ Ｐゴシック" pitchFamily="-106" charset="-128"/>
-              </a:rPr>
+              <a:rPr lang="en-US" b="1" dirty="0"/>
               <a:t>Galatians 3:7–9</a:t>
             </a:r>
             <a:r>
-              <a:rPr lang="en-US" sz="1400" kern="1200" dirty="0">
-                <a:solidFill>
-                  <a:schemeClr val="tx1"/>
-                </a:solidFill>
-                <a:effectLst/>
-                <a:latin typeface="+mn-lt"/>
-                <a:ea typeface="ＭＳ Ｐゴシック" pitchFamily="-106" charset="-128"/>
-                <a:cs typeface="ＭＳ Ｐゴシック" pitchFamily="-106" charset="-128"/>
-              </a:rPr>
+              <a:rPr lang="en-US" dirty="0"/>
               <a:t>  Those of faith are blessed along with Abraham, the man of faith.</a:t>
             </a:r>
           </a:p>
           <a:p>
             <a:pPr rtl="0" fontAlgn="ctr"/>
             <a:r>
-              <a:rPr lang="en-US" sz="1400" b="1" kern="1200" dirty="0">
-                <a:solidFill>
-                  <a:schemeClr val="tx1"/>
-                </a:solidFill>
-                <a:effectLst/>
-                <a:latin typeface="+mn-lt"/>
-                <a:ea typeface="ＭＳ Ｐゴシック" pitchFamily="-106" charset="-128"/>
-                <a:cs typeface="ＭＳ Ｐゴシック" pitchFamily="-106" charset="-128"/>
-              </a:rPr>
+              <a:rPr lang="en-US" b="1" dirty="0"/>
               <a:t>Galatians 3:28–29</a:t>
             </a:r>
             <a:r>
-              <a:rPr lang="en-US" sz="1400" kern="1200" dirty="0">
-                <a:solidFill>
-                  <a:schemeClr val="tx1"/>
-                </a:solidFill>
-                <a:effectLst/>
-                <a:latin typeface="+mn-lt"/>
-                <a:ea typeface="ＭＳ Ｐゴシック" pitchFamily="-106" charset="-128"/>
-                <a:cs typeface="ＭＳ Ｐゴシック" pitchFamily="-106" charset="-128"/>
-              </a:rPr>
+              <a:rPr lang="en-US" dirty="0"/>
               <a:t>  In Christ, all are one; Jew, Greek, slave, free, male, female; and heirs according to promise.</a:t>
             </a:r>
           </a:p>
           <a:p>
             <a:pPr rtl="0" fontAlgn="ctr"/>
             <a:r>
-              <a:rPr lang="en-US" sz="1400" b="1" kern="1200" dirty="0">
-                <a:solidFill>
-                  <a:schemeClr val="tx1"/>
-                </a:solidFill>
-                <a:effectLst/>
-                <a:latin typeface="+mn-lt"/>
-                <a:ea typeface="ＭＳ Ｐゴシック" pitchFamily="-106" charset="-128"/>
-                <a:cs typeface="ＭＳ Ｐゴシック" pitchFamily="-106" charset="-128"/>
-              </a:rPr>
+              <a:rPr lang="en-US" b="1" dirty="0"/>
               <a:t>Ephesians 3:6</a:t>
             </a:r>
             <a:r>
-              <a:rPr lang="en-US" sz="1400" kern="1200" dirty="0">
-                <a:solidFill>
-                  <a:schemeClr val="tx1"/>
-                </a:solidFill>
-                <a:effectLst/>
-                <a:latin typeface="+mn-lt"/>
-                <a:ea typeface="ＭＳ Ｐゴシック" pitchFamily="-106" charset="-128"/>
-                <a:cs typeface="ＭＳ Ｐゴシック" pitchFamily="-106" charset="-128"/>
-              </a:rPr>
+              <a:rPr lang="en-US" dirty="0"/>
               <a:t> – Gentiles are “fellow heirs, members of the same body, and partakers of the promise in Christ Jesus through the gospel.”</a:t>
             </a:r>
           </a:p>
@@ -8103,14 +6701,14 @@
           <p:nvPr>
             <p:extLst>
               <p:ext uri="{D42A27DB-BD31-4B8C-83A1-F6EECF244321}">
-                <p14:modId xmlns:p14="http://schemas.microsoft.com/office/powerpoint/2010/main" val="3459892984"/>
+                <p14:modId xmlns:p14="http://schemas.microsoft.com/office/powerpoint/2010/main" val="159893823"/>
               </p:ext>
             </p:extLst>
           </p:nvPr>
         </p:nvGraphicFramePr>
         <p:xfrm>
-          <a:off x="29111" y="-70716"/>
-          <a:ext cx="9114889" cy="6928716"/>
+          <a:off x="0" y="-70716"/>
+          <a:ext cx="9144000" cy="6921339"/>
         </p:xfrm>
         <a:graphic>
           <a:graphicData uri="http://schemas.openxmlformats.org/drawingml/2006/table">
@@ -8119,7 +6717,7 @@
                 <a:tableStyleId>{46F890A9-2807-4EBB-B81D-B2AA78EC7F39}</a:tableStyleId>
               </a:tblPr>
               <a:tblGrid>
-                <a:gridCol w="1571089">
+                <a:gridCol w="1600200">
                   <a:extLst>
                     <a:ext uri="{9D8B030D-6E8A-4147-A177-3AD203B41FA5}">
                       <a16:colId xmlns:a16="http://schemas.microsoft.com/office/drawing/2014/main" val="3511153360"/>
@@ -8158,12 +6756,12 @@
                         <a:buNone/>
                       </a:pPr>
                       <a:r>
-                        <a:rPr lang="en-US" sz="1600" b="1" dirty="0">
+                        <a:rPr lang="en-US" sz="1600" b="1" u="sng" dirty="0">
                           <a:effectLst/>
                         </a:rPr>
                         <a:t>Topic</a:t>
                       </a:r>
-                      <a:endParaRPr lang="en-US" sz="1600" dirty="0">
+                      <a:endParaRPr lang="en-US" sz="1600" u="sng" dirty="0">
                         <a:effectLst/>
                         <a:latin typeface="Calibri" panose="020F0502020204030204" pitchFamily="34" charset="0"/>
                       </a:endParaRPr>
@@ -8180,12 +6778,12 @@
                         <a:buNone/>
                       </a:pPr>
                       <a:r>
-                        <a:rPr lang="en-US" sz="1600" b="1">
+                        <a:rPr lang="en-US" sz="1600" b="1" u="sng" dirty="0">
                           <a:effectLst/>
                         </a:rPr>
                         <a:t>Common Protestant View</a:t>
                       </a:r>
-                      <a:endParaRPr lang="en-US" sz="1600">
+                      <a:endParaRPr lang="en-US" sz="1600" u="sng" dirty="0">
                         <a:effectLst/>
                         <a:latin typeface="Calibri" panose="020F0502020204030204" pitchFamily="34" charset="0"/>
                       </a:endParaRPr>
@@ -8202,12 +6800,12 @@
                         <a:buNone/>
                       </a:pPr>
                       <a:r>
-                        <a:rPr lang="en-US" sz="1600" b="1">
+                        <a:rPr lang="en-US" sz="1600" b="1" u="sng" dirty="0">
                           <a:effectLst/>
                         </a:rPr>
                         <a:t>Restoration Theology Emphasis</a:t>
                       </a:r>
-                      <a:endParaRPr lang="en-US" sz="1600">
+                      <a:endParaRPr lang="en-US" sz="1600" u="sng" dirty="0">
                         <a:effectLst/>
                         <a:latin typeface="Calibri" panose="020F0502020204030204" pitchFamily="34" charset="0"/>
                       </a:endParaRPr>
@@ -8224,12 +6822,12 @@
                         <a:buNone/>
                       </a:pPr>
                       <a:r>
-                        <a:rPr lang="en-US" sz="1600" b="1" dirty="0">
+                        <a:rPr lang="en-US" sz="1600" b="1" u="sng" dirty="0">
                           <a:effectLst/>
                         </a:rPr>
                         <a:t>Key Text</a:t>
                       </a:r>
-                      <a:endParaRPr lang="en-US" sz="1600" dirty="0">
+                      <a:endParaRPr lang="en-US" sz="1600" u="sng" dirty="0">
                         <a:effectLst/>
                         <a:latin typeface="Calibri" panose="020F0502020204030204" pitchFamily="34" charset="0"/>
                       </a:endParaRPr>
@@ -8607,7 +7205,7 @@
                         <a:rPr lang="en-US" sz="1600" dirty="0">
                           <a:effectLst/>
                         </a:rPr>
-                        <a:t>Rom. 6:3–4</a:t>
+                        <a:t>Rom. 6:3-4</a:t>
                       </a:r>
                       <a:endParaRPr lang="en-US" sz="1600" dirty="0">
                         <a:effectLst/>
@@ -8633,12 +7231,12 @@
                         <a:buNone/>
                       </a:pPr>
                       <a:r>
-                        <a:rPr lang="en-US" sz="1600" b="1">
+                        <a:rPr lang="en-US" sz="1600" b="1" dirty="0">
                           <a:effectLst/>
                         </a:rPr>
                         <a:t>Righteousness</a:t>
                       </a:r>
-                      <a:endParaRPr lang="en-US" sz="1600">
+                      <a:endParaRPr lang="en-US" sz="1600" dirty="0">
                         <a:effectLst/>
                         <a:latin typeface="Calibri" panose="020F0502020204030204" pitchFamily="34" charset="0"/>
                       </a:endParaRPr>
@@ -8655,12 +7253,12 @@
                         <a:buNone/>
                       </a:pPr>
                       <a:r>
-                        <a:rPr lang="en-US" sz="1600">
+                        <a:rPr lang="en-US" sz="1600" dirty="0">
                           <a:effectLst/>
                         </a:rPr>
                         <a:t>Imputed only (legal standing)</a:t>
                       </a:r>
-                      <a:endParaRPr lang="en-US" sz="1600">
+                      <a:endParaRPr lang="en-US" sz="1600" dirty="0">
                         <a:effectLst/>
                         <a:latin typeface="Calibri" panose="020F0502020204030204" pitchFamily="34" charset="0"/>
                       </a:endParaRPr>
@@ -8677,12 +7275,12 @@
                         <a:buNone/>
                       </a:pPr>
                       <a:r>
-                        <a:rPr lang="en-US" sz="1600">
+                        <a:rPr lang="en-US" sz="1600" dirty="0">
                           <a:effectLst/>
                         </a:rPr>
-                        <a:t>Imputed and lived out (transformation)</a:t>
+                        <a:t>Imputed &amp; lived out (transformation)</a:t>
                       </a:r>
-                      <a:endParaRPr lang="en-US" sz="1600">
+                      <a:endParaRPr lang="en-US" sz="1600" dirty="0">
                         <a:effectLst/>
                         <a:latin typeface="Calibri" panose="020F0502020204030204" pitchFamily="34" charset="0"/>
                       </a:endParaRPr>
@@ -9082,7 +7680,7 @@
                         <a:rPr lang="en-US" sz="1600" dirty="0">
                           <a:effectLst/>
                         </a:rPr>
-                        <a:t>Rom. 6:1–2</a:t>
+                        <a:t>Rom. 6:1-2</a:t>
                       </a:r>
                       <a:endParaRPr lang="en-US" sz="1600" dirty="0">
                         <a:effectLst/>
@@ -9272,7 +7870,7 @@
                         <a:rPr lang="en-US" sz="1600" dirty="0">
                           <a:effectLst/>
                         </a:rPr>
-                        <a:t>Rom. 8:1–4</a:t>
+                        <a:t>Rom. 8:1-4</a:t>
                       </a:r>
                       <a:endParaRPr lang="en-US" sz="1600" dirty="0">
                         <a:effectLst/>
